--- a/redes_neurais/slides/cap04_Backpropagation_e_MLP.pptx
+++ b/redes_neurais/slides/cap04_Backpropagation_e_MLP.pptx
@@ -18,9 +18,15 @@
     <p:sldId id="266" r:id="rId12"/>
     <p:sldId id="267" r:id="rId13"/>
     <p:sldId id="268" r:id="rId14"/>
+    <p:sldId id="269" r:id="rId15"/>
+    <p:sldId id="270" r:id="rId16"/>
+    <p:sldId id="271" r:id="rId17"/>
+    <p:sldId id="272" r:id="rId18"/>
+    <p:sldId id="273" r:id="rId19"/>
+    <p:sldId id="274" r:id="rId20"/>
   </p:sldIdLst>
   <p:notesMasterIdLst>
-    <p:notesMasterId r:id="rId15"/>
+    <p:notesMasterId r:id="rId21"/>
   </p:notesMasterIdLst>
   <p:sldSz cx="9144000" cy="5143500"/>
   <p:notesSz cx="5143500" cy="9144000"/>
@@ -602,7 +608,7 @@
           <a:p>
             <a:r>
               <a:rPr lang="en-US" dirty="0"/>
-              <a:t>Exemplo do livro: rótulos aleatórios com seleção de atributos feita antes da divisão deram 0,950 de acurácia; o correto, 0,483 (acaso).</a:t>
+              <a:t>O teorema afirma a existência de uma rede; não diz como achá-la nem quantos neurônios são necessários na prática.</a:t>
             </a:r>
             <a:endParaRPr lang="en-US" dirty="0"/>
           </a:p>
@@ -690,7 +696,7 @@
           <a:p>
             <a:r>
               <a:rPr lang="en-US" dirty="0"/>
-              <a:t>No scikit-learn, loss_ equivale a E_sse/(N·m) neste livro: confira as convenções antes de comparar.</a:t>
+              <a:t>Neste livro, os algoritmos dos capítulos 5 a 8 são de lote.</a:t>
             </a:r>
             <a:endParaRPr lang="en-US" dirty="0"/>
           </a:p>
@@ -778,7 +784,7 @@
           <a:p>
             <a:r>
               <a:rPr lang="en-US" dirty="0"/>
-              <a:t>Tempo: 20 minutos. Peça que cada grupo explique um δ.</a:t>
+              <a:t>Exemplo do livro: rótulos aleatórios com seleção de atributos feita antes da divisão deram 0,950 de acurácia; o correto, 0,483 (acaso).</a:t>
             </a:r>
             <a:endParaRPr lang="en-US" dirty="0"/>
           </a:p>
@@ -866,7 +872,7 @@
           <a:p>
             <a:r>
               <a:rPr lang="en-US" dirty="0"/>
-              <a:t>Próximo: como acelerar o treinamento? Quickprop, RPROP, LM e DBD.</a:t>
+              <a:t>No scikit-learn, loss_ equivale a E_sse/(N·m) neste livro: confira as convenções antes de comparar.</a:t>
             </a:r>
             <a:endParaRPr lang="en-US" dirty="0"/>
           </a:p>
@@ -890,6 +896,534 @@
             <a:fld id="{F7021451-1387-4CA6-816F-3879F97B5CBC}" type="slidenum">
               <a:rPr lang="en-US"/>
               <a:t>13</a:t>
+            </a:fld>
+            <a:endParaRPr lang="en-US"/>
+          </a:p>
+        </p:txBody>
+      </p:sp>
+    </p:spTree>
+    <p:extLst>
+      <p:ext uri="{BB962C8B-B14F-4D97-AF65-F5344CB8AC3E}">
+        <p14:creationId xmlns:p14="http://schemas.microsoft.com/office/powerpoint/2010/main" val="1024086991"/>
+      </p:ext>
+    </p:extLst>
+  </p:cSld>
+  <p:clrMapOvr>
+    <a:masterClrMapping/>
+  </p:clrMapOvr>
+</p:notes>
+</file>
+
+<file path=ppt/notesSlides/notesSlide14.xml><?xml version="1.0" encoding="utf-8"?>
+<p:notes xmlns:a="http://schemas.openxmlformats.org/drawingml/2006/main" xmlns:r="http://schemas.openxmlformats.org/officeDocument/2006/relationships" xmlns:p="http://schemas.openxmlformats.org/presentationml/2006/main">
+  <p:cSld>
+    <p:spTree>
+      <p:nvGrpSpPr>
+        <p:cNvPr id="1" name=""/>
+        <p:cNvGrpSpPr/>
+        <p:nvPr/>
+      </p:nvGrpSpPr>
+      <p:grpSpPr>
+        <a:xfrm>
+          <a:off x="0" y="0"/>
+          <a:ext cx="0" cy="0"/>
+          <a:chOff x="0" y="0"/>
+          <a:chExt cx="0" cy="0"/>
+        </a:xfrm>
+      </p:grpSpPr>
+      <p:sp>
+        <p:nvSpPr>
+          <p:cNvPr id="2" name="Slide Image Placeholder 1"/>
+          <p:cNvSpPr>
+            <a:spLocks noGrp="1" noRot="1" noChangeAspect="1"/>
+          </p:cNvSpPr>
+          <p:nvPr>
+            <p:ph type="sldImg"/>
+          </p:nvPr>
+        </p:nvSpPr>
+        <p:spPr/>
+      </p:sp>
+      <p:sp>
+        <p:nvSpPr>
+          <p:cNvPr id="3" name="Notes Placeholder 2"/>
+          <p:cNvSpPr>
+            <a:spLocks noGrp="1"/>
+          </p:cNvSpPr>
+          <p:nvPr>
+            <p:ph type="body" idx="1"/>
+          </p:nvPr>
+        </p:nvSpPr>
+        <p:spPr/>
+        <p:txBody>
+          <a:bodyPr/>
+          <a:lstStyle/>
+          <a:p>
+            <a:r>
+              <a:rPr lang="en-US" dirty="0"/>
+              <a:t>Conexão com o artifício +0,1 de Fahlman (Cap. 5) para evitar platôs da sigmoide.</a:t>
+            </a:r>
+            <a:endParaRPr lang="en-US" dirty="0"/>
+          </a:p>
+        </p:txBody>
+      </p:sp>
+      <p:sp>
+        <p:nvSpPr>
+          <p:cNvPr id="4" name="Slide Number Placeholder 3"/>
+          <p:cNvSpPr>
+            <a:spLocks noGrp="1"/>
+          </p:cNvSpPr>
+          <p:nvPr>
+            <p:ph type="sldNum" sz="quarter" idx="10"/>
+          </p:nvPr>
+        </p:nvSpPr>
+        <p:spPr/>
+        <p:txBody>
+          <a:bodyPr/>
+          <a:lstStyle/>
+          <a:p>
+            <a:fld id="{F7021451-1387-4CA6-816F-3879F97B5CBC}" type="slidenum">
+              <a:rPr lang="en-US"/>
+              <a:t>14</a:t>
+            </a:fld>
+            <a:endParaRPr lang="en-US"/>
+          </a:p>
+        </p:txBody>
+      </p:sp>
+    </p:spTree>
+    <p:extLst>
+      <p:ext uri="{BB962C8B-B14F-4D97-AF65-F5344CB8AC3E}">
+        <p14:creationId xmlns:p14="http://schemas.microsoft.com/office/powerpoint/2010/main" val="1024086991"/>
+      </p:ext>
+    </p:extLst>
+  </p:cSld>
+  <p:clrMapOvr>
+    <a:masterClrMapping/>
+  </p:clrMapOvr>
+</p:notes>
+</file>
+
+<file path=ppt/notesSlides/notesSlide15.xml><?xml version="1.0" encoding="utf-8"?>
+<p:notes xmlns:a="http://schemas.openxmlformats.org/drawingml/2006/main" xmlns:r="http://schemas.openxmlformats.org/officeDocument/2006/relationships" xmlns:p="http://schemas.openxmlformats.org/presentationml/2006/main">
+  <p:cSld>
+    <p:spTree>
+      <p:nvGrpSpPr>
+        <p:cNvPr id="1" name=""/>
+        <p:cNvGrpSpPr/>
+        <p:nvPr/>
+      </p:nvGrpSpPr>
+      <p:grpSpPr>
+        <a:xfrm>
+          <a:off x="0" y="0"/>
+          <a:ext cx="0" cy="0"/>
+          <a:chOff x="0" y="0"/>
+          <a:chExt cx="0" cy="0"/>
+        </a:xfrm>
+      </p:grpSpPr>
+      <p:sp>
+        <p:nvSpPr>
+          <p:cNvPr id="2" name="Slide Image Placeholder 1"/>
+          <p:cNvSpPr>
+            <a:spLocks noGrp="1" noRot="1" noChangeAspect="1"/>
+          </p:cNvSpPr>
+          <p:nvPr>
+            <p:ph type="sldImg"/>
+          </p:nvPr>
+        </p:nvSpPr>
+        <p:spPr/>
+      </p:sp>
+      <p:sp>
+        <p:nvSpPr>
+          <p:cNvPr id="3" name="Notes Placeholder 2"/>
+          <p:cNvSpPr>
+            <a:spLocks noGrp="1"/>
+          </p:cNvSpPr>
+          <p:nvPr>
+            <p:ph type="body" idx="1"/>
+          </p:nvPr>
+        </p:nvSpPr>
+        <p:spPr/>
+        <p:txBody>
+          <a:bodyPr/>
+          <a:lstStyle/>
+          <a:p>
+            <a:r>
+              <a:rPr lang="en-US" dirty="0"/>
+              <a:t>Resposta: A) y − t. O fator y(1 − y) se cancela com o da entropia cruzada. Dê um minuto para votação antes de revelar.</a:t>
+            </a:r>
+            <a:endParaRPr lang="en-US" dirty="0"/>
+          </a:p>
+        </p:txBody>
+      </p:sp>
+      <p:sp>
+        <p:nvSpPr>
+          <p:cNvPr id="4" name="Slide Number Placeholder 3"/>
+          <p:cNvSpPr>
+            <a:spLocks noGrp="1"/>
+          </p:cNvSpPr>
+          <p:nvPr>
+            <p:ph type="sldNum" sz="quarter" idx="10"/>
+          </p:nvPr>
+        </p:nvSpPr>
+        <p:spPr/>
+        <p:txBody>
+          <a:bodyPr/>
+          <a:lstStyle/>
+          <a:p>
+            <a:fld id="{F7021451-1387-4CA6-816F-3879F97B5CBC}" type="slidenum">
+              <a:rPr lang="en-US"/>
+              <a:t>15</a:t>
+            </a:fld>
+            <a:endParaRPr lang="en-US"/>
+          </a:p>
+        </p:txBody>
+      </p:sp>
+    </p:spTree>
+    <p:extLst>
+      <p:ext uri="{BB962C8B-B14F-4D97-AF65-F5344CB8AC3E}">
+        <p14:creationId xmlns:p14="http://schemas.microsoft.com/office/powerpoint/2010/main" val="1024086991"/>
+      </p:ext>
+    </p:extLst>
+  </p:cSld>
+  <p:clrMapOvr>
+    <a:masterClrMapping/>
+  </p:clrMapOvr>
+</p:notes>
+</file>
+
+<file path=ppt/notesSlides/notesSlide16.xml><?xml version="1.0" encoding="utf-8"?>
+<p:notes xmlns:a="http://schemas.openxmlformats.org/drawingml/2006/main" xmlns:r="http://schemas.openxmlformats.org/officeDocument/2006/relationships" xmlns:p="http://schemas.openxmlformats.org/presentationml/2006/main">
+  <p:cSld>
+    <p:spTree>
+      <p:nvGrpSpPr>
+        <p:cNvPr id="1" name=""/>
+        <p:cNvGrpSpPr/>
+        <p:nvPr/>
+      </p:nvGrpSpPr>
+      <p:grpSpPr>
+        <a:xfrm>
+          <a:off x="0" y="0"/>
+          <a:ext cx="0" cy="0"/>
+          <a:chOff x="0" y="0"/>
+          <a:chExt cx="0" cy="0"/>
+        </a:xfrm>
+      </p:grpSpPr>
+      <p:sp>
+        <p:nvSpPr>
+          <p:cNvPr id="2" name="Slide Image Placeholder 1"/>
+          <p:cNvSpPr>
+            <a:spLocks noGrp="1" noRot="1" noChangeAspect="1"/>
+          </p:cNvSpPr>
+          <p:nvPr>
+            <p:ph type="sldImg"/>
+          </p:nvPr>
+        </p:nvSpPr>
+        <p:spPr/>
+      </p:sp>
+      <p:sp>
+        <p:nvSpPr>
+          <p:cNvPr id="3" name="Notes Placeholder 2"/>
+          <p:cNvSpPr>
+            <a:spLocks noGrp="1"/>
+          </p:cNvSpPr>
+          <p:nvPr>
+            <p:ph type="body" idx="1"/>
+          </p:nvPr>
+        </p:nvSpPr>
+        <p:spPr/>
+        <p:txBody>
+          <a:bodyPr/>
+          <a:lstStyle/>
+          <a:p>
+            <a:r>
+              <a:rPr lang="en-US" dirty="0"/>
+              <a:t>Resposta: A) Escalar os dados antes de dividir treino e teste. Informação do teste vaza para o treino; o livro mostrou 0,950 contra 0,483 com rótulos aleatórios. Dê um minuto para votação antes de revelar.</a:t>
+            </a:r>
+            <a:endParaRPr lang="en-US" dirty="0"/>
+          </a:p>
+        </p:txBody>
+      </p:sp>
+      <p:sp>
+        <p:nvSpPr>
+          <p:cNvPr id="4" name="Slide Number Placeholder 3"/>
+          <p:cNvSpPr>
+            <a:spLocks noGrp="1"/>
+          </p:cNvSpPr>
+          <p:nvPr>
+            <p:ph type="sldNum" sz="quarter" idx="10"/>
+          </p:nvPr>
+        </p:nvSpPr>
+        <p:spPr/>
+        <p:txBody>
+          <a:bodyPr/>
+          <a:lstStyle/>
+          <a:p>
+            <a:fld id="{F7021451-1387-4CA6-816F-3879F97B5CBC}" type="slidenum">
+              <a:rPr lang="en-US"/>
+              <a:t>16</a:t>
+            </a:fld>
+            <a:endParaRPr lang="en-US"/>
+          </a:p>
+        </p:txBody>
+      </p:sp>
+    </p:spTree>
+    <p:extLst>
+      <p:ext uri="{BB962C8B-B14F-4D97-AF65-F5344CB8AC3E}">
+        <p14:creationId xmlns:p14="http://schemas.microsoft.com/office/powerpoint/2010/main" val="1024086991"/>
+      </p:ext>
+    </p:extLst>
+  </p:cSld>
+  <p:clrMapOvr>
+    <a:masterClrMapping/>
+  </p:clrMapOvr>
+</p:notes>
+</file>
+
+<file path=ppt/notesSlides/notesSlide17.xml><?xml version="1.0" encoding="utf-8"?>
+<p:notes xmlns:a="http://schemas.openxmlformats.org/drawingml/2006/main" xmlns:r="http://schemas.openxmlformats.org/officeDocument/2006/relationships" xmlns:p="http://schemas.openxmlformats.org/presentationml/2006/main">
+  <p:cSld>
+    <p:spTree>
+      <p:nvGrpSpPr>
+        <p:cNvPr id="1" name=""/>
+        <p:cNvGrpSpPr/>
+        <p:nvPr/>
+      </p:nvGrpSpPr>
+      <p:grpSpPr>
+        <a:xfrm>
+          <a:off x="0" y="0"/>
+          <a:ext cx="0" cy="0"/>
+          <a:chOff x="0" y="0"/>
+          <a:chExt cx="0" cy="0"/>
+        </a:xfrm>
+      </p:grpSpPr>
+      <p:sp>
+        <p:nvSpPr>
+          <p:cNvPr id="2" name="Slide Image Placeholder 1"/>
+          <p:cNvSpPr>
+            <a:spLocks noGrp="1" noRot="1" noChangeAspect="1"/>
+          </p:cNvSpPr>
+          <p:nvPr>
+            <p:ph type="sldImg"/>
+          </p:nvPr>
+        </p:nvSpPr>
+        <p:spPr/>
+      </p:sp>
+      <p:sp>
+        <p:nvSpPr>
+          <p:cNvPr id="3" name="Notes Placeholder 2"/>
+          <p:cNvSpPr>
+            <a:spLocks noGrp="1"/>
+          </p:cNvSpPr>
+          <p:nvPr>
+            <p:ph type="body" idx="1"/>
+          </p:nvPr>
+        </p:nvSpPr>
+        <p:spPr/>
+        <p:txBody>
+          <a:bodyPr/>
+          <a:lstStyle/>
+          <a:p>
+            <a:r>
+              <a:rPr lang="en-US" dirty="0"/>
+              <a:t>Tempo: 20 minutos. Peça que cada grupo explique um δ.</a:t>
+            </a:r>
+            <a:endParaRPr lang="en-US" dirty="0"/>
+          </a:p>
+        </p:txBody>
+      </p:sp>
+      <p:sp>
+        <p:nvSpPr>
+          <p:cNvPr id="4" name="Slide Number Placeholder 3"/>
+          <p:cNvSpPr>
+            <a:spLocks noGrp="1"/>
+          </p:cNvSpPr>
+          <p:nvPr>
+            <p:ph type="sldNum" sz="quarter" idx="10"/>
+          </p:nvPr>
+        </p:nvSpPr>
+        <p:spPr/>
+        <p:txBody>
+          <a:bodyPr/>
+          <a:lstStyle/>
+          <a:p>
+            <a:fld id="{F7021451-1387-4CA6-816F-3879F97B5CBC}" type="slidenum">
+              <a:rPr lang="en-US"/>
+              <a:t>17</a:t>
+            </a:fld>
+            <a:endParaRPr lang="en-US"/>
+          </a:p>
+        </p:txBody>
+      </p:sp>
+    </p:spTree>
+    <p:extLst>
+      <p:ext uri="{BB962C8B-B14F-4D97-AF65-F5344CB8AC3E}">
+        <p14:creationId xmlns:p14="http://schemas.microsoft.com/office/powerpoint/2010/main" val="1024086991"/>
+      </p:ext>
+    </p:extLst>
+  </p:cSld>
+  <p:clrMapOvr>
+    <a:masterClrMapping/>
+  </p:clrMapOvr>
+</p:notes>
+</file>
+
+<file path=ppt/notesSlides/notesSlide18.xml><?xml version="1.0" encoding="utf-8"?>
+<p:notes xmlns:a="http://schemas.openxmlformats.org/drawingml/2006/main" xmlns:r="http://schemas.openxmlformats.org/officeDocument/2006/relationships" xmlns:p="http://schemas.openxmlformats.org/presentationml/2006/main">
+  <p:cSld>
+    <p:spTree>
+      <p:nvGrpSpPr>
+        <p:cNvPr id="1" name=""/>
+        <p:cNvGrpSpPr/>
+        <p:nvPr/>
+      </p:nvGrpSpPr>
+      <p:grpSpPr>
+        <a:xfrm>
+          <a:off x="0" y="0"/>
+          <a:ext cx="0" cy="0"/>
+          <a:chOff x="0" y="0"/>
+          <a:chExt cx="0" cy="0"/>
+        </a:xfrm>
+      </p:grpSpPr>
+      <p:sp>
+        <p:nvSpPr>
+          <p:cNvPr id="2" name="Slide Image Placeholder 1"/>
+          <p:cNvSpPr>
+            <a:spLocks noGrp="1" noRot="1" noChangeAspect="1"/>
+          </p:cNvSpPr>
+          <p:nvPr>
+            <p:ph type="sldImg"/>
+          </p:nvPr>
+        </p:nvSpPr>
+        <p:spPr/>
+      </p:sp>
+      <p:sp>
+        <p:nvSpPr>
+          <p:cNvPr id="3" name="Notes Placeholder 2"/>
+          <p:cNvSpPr>
+            <a:spLocks noGrp="1"/>
+          </p:cNvSpPr>
+          <p:nvPr>
+            <p:ph type="body" idx="1"/>
+          </p:nvPr>
+        </p:nvSpPr>
+        <p:spPr/>
+        <p:txBody>
+          <a:bodyPr/>
+          <a:lstStyle/>
+          <a:p>
+            <a:r>
+              <a:rPr lang="en-US" dirty="0"/>
+              <a:t>Próximo: como acelerar o treinamento? Quickprop, RPROP, LM e DBD.</a:t>
+            </a:r>
+            <a:endParaRPr lang="en-US" dirty="0"/>
+          </a:p>
+        </p:txBody>
+      </p:sp>
+      <p:sp>
+        <p:nvSpPr>
+          <p:cNvPr id="4" name="Slide Number Placeholder 3"/>
+          <p:cNvSpPr>
+            <a:spLocks noGrp="1"/>
+          </p:cNvSpPr>
+          <p:nvPr>
+            <p:ph type="sldNum" sz="quarter" idx="10"/>
+          </p:nvPr>
+        </p:nvSpPr>
+        <p:spPr/>
+        <p:txBody>
+          <a:bodyPr/>
+          <a:lstStyle/>
+          <a:p>
+            <a:fld id="{F7021451-1387-4CA6-816F-3879F97B5CBC}" type="slidenum">
+              <a:rPr lang="en-US"/>
+              <a:t>18</a:t>
+            </a:fld>
+            <a:endParaRPr lang="en-US"/>
+          </a:p>
+        </p:txBody>
+      </p:sp>
+    </p:spTree>
+    <p:extLst>
+      <p:ext uri="{BB962C8B-B14F-4D97-AF65-F5344CB8AC3E}">
+        <p14:creationId xmlns:p14="http://schemas.microsoft.com/office/powerpoint/2010/main" val="1024086991"/>
+      </p:ext>
+    </p:extLst>
+  </p:cSld>
+  <p:clrMapOvr>
+    <a:masterClrMapping/>
+  </p:clrMapOvr>
+</p:notes>
+</file>
+
+<file path=ppt/notesSlides/notesSlide19.xml><?xml version="1.0" encoding="utf-8"?>
+<p:notes xmlns:a="http://schemas.openxmlformats.org/drawingml/2006/main" xmlns:r="http://schemas.openxmlformats.org/officeDocument/2006/relationships" xmlns:p="http://schemas.openxmlformats.org/presentationml/2006/main">
+  <p:cSld>
+    <p:spTree>
+      <p:nvGrpSpPr>
+        <p:cNvPr id="1" name=""/>
+        <p:cNvGrpSpPr/>
+        <p:nvPr/>
+      </p:nvGrpSpPr>
+      <p:grpSpPr>
+        <a:xfrm>
+          <a:off x="0" y="0"/>
+          <a:ext cx="0" cy="0"/>
+          <a:chOff x="0" y="0"/>
+          <a:chExt cx="0" cy="0"/>
+        </a:xfrm>
+      </p:grpSpPr>
+      <p:sp>
+        <p:nvSpPr>
+          <p:cNvPr id="2" name="Slide Image Placeholder 1"/>
+          <p:cNvSpPr>
+            <a:spLocks noGrp="1" noRot="1" noChangeAspect="1"/>
+          </p:cNvSpPr>
+          <p:nvPr>
+            <p:ph type="sldImg"/>
+          </p:nvPr>
+        </p:nvSpPr>
+        <p:spPr/>
+      </p:sp>
+      <p:sp>
+        <p:nvSpPr>
+          <p:cNvPr id="3" name="Notes Placeholder 2"/>
+          <p:cNvSpPr>
+            <a:spLocks noGrp="1"/>
+          </p:cNvSpPr>
+          <p:nvPr>
+            <p:ph type="body" idx="1"/>
+          </p:nvPr>
+        </p:nvSpPr>
+        <p:spPr/>
+        <p:txBody>
+          <a:bodyPr/>
+          <a:lstStyle/>
+          <a:p>
+            <a:r>
+              <a:rPr lang="en-US" dirty="0"/>
+              <a:t>Feche com a frase e peça que os estudantes a expliquem com as próprias palavras.</a:t>
+            </a:r>
+            <a:endParaRPr lang="en-US" dirty="0"/>
+          </a:p>
+        </p:txBody>
+      </p:sp>
+      <p:sp>
+        <p:nvSpPr>
+          <p:cNvPr id="4" name="Slide Number Placeholder 3"/>
+          <p:cNvSpPr>
+            <a:spLocks noGrp="1"/>
+          </p:cNvSpPr>
+          <p:nvPr>
+            <p:ph type="sldNum" sz="quarter" idx="10"/>
+          </p:nvPr>
+        </p:nvSpPr>
+        <p:spPr/>
+        <p:txBody>
+          <a:bodyPr/>
+          <a:lstStyle/>
+          <a:p>
+            <a:fld id="{F7021451-1387-4CA6-816F-3879F97B5CBC}" type="slidenum">
+              <a:rPr lang="en-US"/>
+              <a:t>19</a:t>
             </a:fld>
             <a:endParaRPr lang="en-US"/>
           </a:p>
@@ -954,7 +1488,7 @@
           <a:p>
             <a:r>
               <a:rPr lang="en-US" dirty="0"/>
-              <a:t>Analogia: um erro numa linha de montagem; cada estação pergunta quanto contribuiu para o defeito final.</a:t>
+              <a:t>Apresente o roteiro e o tempo estimado de cada bloco (cerca de 2 minutos por slide).</a:t>
             </a:r>
             <a:endParaRPr lang="en-US" dirty="0"/>
           </a:p>
@@ -1042,7 +1576,7 @@
           <a:p>
             <a:r>
               <a:rPr lang="en-US" dirty="0"/>
-              <a:t>Passe primeiro a passagem direta (forward) e só depois a reversa.</a:t>
+              <a:t>Analogia: um erro numa linha de montagem; cada estação pergunta quanto contribuiu para o defeito final.</a:t>
             </a:r>
             <a:endParaRPr lang="en-US" dirty="0"/>
           </a:p>
@@ -1130,7 +1664,7 @@
           <a:p>
             <a:r>
               <a:rPr lang="en-US" dirty="0"/>
-              <a:t>Amostras nas linhas; confira as dimensões em cada passo.</a:t>
+              <a:t>Passe primeiro a passagem direta (forward) e só depois a reversa.</a:t>
             </a:r>
             <a:endParaRPr lang="en-US" dirty="0"/>
           </a:p>
@@ -1218,7 +1752,7 @@
           <a:p>
             <a:r>
               <a:rPr lang="en-US" dirty="0"/>
-              <a:t>δ = ∂E/∂z. Em classificação com entropia cruzada e saída sigmoide, δ da saída é simplesmente y − t.</a:t>
+              <a:t>Cada δ é a responsabilidade de um neurônio pelo erro. Peça que citem a regra matemática usada para repartir (a cadeia).</a:t>
             </a:r>
             <a:endParaRPr lang="en-US" dirty="0"/>
           </a:p>
@@ -1306,7 +1840,7 @@
           <a:p>
             <a:r>
               <a:rPr lang="en-US" dirty="0"/>
-              <a:t>Hábito profissional: sempre comparar o gradiente analítico com o numérico antes de treinar.</a:t>
+              <a:t>Amostras nas linhas; confira as dimensões em cada passo.</a:t>
             </a:r>
             <a:endParaRPr lang="en-US" dirty="0"/>
           </a:p>
@@ -1394,7 +1928,7 @@
           <a:p>
             <a:r>
               <a:rPr lang="en-US" dirty="0"/>
-              <a:t>Resultado do livro: 28 de 30 sementes resolveram o XOR na configuração testada. Não generalize.</a:t>
+              <a:t>δ = ∂E/∂z. Em classificação com entropia cruzada e saída sigmoide, δ da saída é simplesmente y − t.</a:t>
             </a:r>
             <a:endParaRPr lang="en-US" dirty="0"/>
           </a:p>
@@ -1482,7 +2016,7 @@
           <a:p>
             <a:r>
               <a:rPr lang="en-US" dirty="0"/>
-              <a:t>O teorema afirma a existência de uma rede; não diz como achá-la nem quantos neurônios são necessários na prática.</a:t>
+              <a:t>Hábito profissional: sempre comparar o gradiente analítico com o numérico antes de treinar.</a:t>
             </a:r>
             <a:endParaRPr lang="en-US" dirty="0"/>
           </a:p>
@@ -1570,7 +2104,7 @@
           <a:p>
             <a:r>
               <a:rPr lang="en-US" dirty="0"/>
-              <a:t>Neste livro, os algoritmos dos capítulos 5 a 8 são de lote.</a:t>
+              <a:t>Resultado do livro: 28 de 30 sementes resolveram o XOR na configuração testada. Não generalize.</a:t>
             </a:r>
             <a:endParaRPr lang="en-US" dirty="0"/>
           </a:p>
@@ -2379,7 +2913,7 @@
                 <a:ea typeface="Calibri" pitchFamily="34" charset="-122"/>
                 <a:cs typeface="Calibri" pitchFamily="34" charset="-120"/>
               </a:rPr>
-              <a:t>Divisão da amostra e vazamento</a:t>
+              <a:t>Aproximação universal</a:t>
             </a:r>
             <a:endParaRPr lang="en-US" sz="2600" dirty="0"/>
           </a:p>
@@ -2387,7 +2921,7 @@
       </p:sp>
       <p:pic>
         <p:nvPicPr>
-          <p:cNvPr id="3" name="Image 0" descr="Treino, validação e teste: o teste só no fim.">    </p:cNvPr>
+          <p:cNvPr id="3" name="Image 0" descr="Mais neurônios ocultos, melhor ajuste de uma função contínua.">    </p:cNvPr>
           <p:cNvPicPr>
             <a:picLocks noChangeAspect="1"/>
           </p:cNvPicPr>
@@ -2401,8 +2935,8 @@
         </p:blipFill>
         <p:spPr>
           <a:xfrm>
-            <a:off x="971140" y="1005840"/>
-            <a:ext cx="7201720" cy="3154680"/>
+            <a:off x="1720594" y="1005840"/>
+            <a:ext cx="5702811" cy="3154680"/>
           </a:xfrm>
           <a:prstGeom prst="rect">
             <a:avLst/>
@@ -2441,7 +2975,7 @@
                   <a:srgbClr val="4B5563"/>
                 </a:solidFill>
               </a:rPr>
-              <a:t>Treino, validação e teste: o teste só no fim.</a:t>
+              <a:t>Mais neurônios ocultos, melhor ajuste de uma função contínua.</a:t>
             </a:r>
             <a:endParaRPr lang="en-US" sz="1400" dirty="0"/>
           </a:p>
@@ -2552,22 +3086,46 @@
                 <a:ea typeface="Calibri" pitchFamily="34" charset="-122"/>
                 <a:cs typeface="Calibri" pitchFamily="34" charset="-120"/>
               </a:rPr>
-              <a:t>Erros frequentes</a:t>
+              <a:t>Lote, minilote, padrão a padrão</a:t>
             </a:r>
             <a:endParaRPr lang="en-US" sz="2600" dirty="0"/>
           </a:p>
         </p:txBody>
       </p:sp>
-      <p:sp>
-        <p:nvSpPr>
-          <p:cNvPr id="3" name="Text 1"/>
+      <p:pic>
+        <p:nvPicPr>
+          <p:cNvPr id="3" name="Image 0" descr="Compromisso entre ruído e custo por atualização.">    </p:cNvPr>
+          <p:cNvPicPr>
+            <a:picLocks noChangeAspect="1"/>
+          </p:cNvPicPr>
+          <p:nvPr/>
+        </p:nvPicPr>
+        <p:blipFill>
+          <a:blip r:embed="rId1"/>
+          <a:stretch>
+            <a:fillRect/>
+          </a:stretch>
+        </p:blipFill>
+        <p:spPr>
+          <a:xfrm>
+            <a:off x="795361" y="1005840"/>
+            <a:ext cx="7553279" cy="3154680"/>
+          </a:xfrm>
+          <a:prstGeom prst="rect">
+            <a:avLst/>
+          </a:prstGeom>
+        </p:spPr>
+      </p:pic>
+      <p:sp>
+        <p:nvSpPr>
+          <p:cNvPr id="4" name="Text 1"/>
           <p:cNvSpPr txBox="1"/>
           <p:nvPr/>
         </p:nvSpPr>
         <p:spPr>
           <a:xfrm>
-            <a:off x="548640" y="1188720"/>
-            <a:ext cx="8046720" cy="3383280"/>
+            <a:off x="457200" y="4251960"/>
+            <a:ext cx="8229600" cy="457200"/>
           </a:xfrm>
           <a:prstGeom prst="rect">
             <a:avLst/>
@@ -2581,76 +3139,18 @@
           </a:bodyPr>
           <a:lstStyle/>
           <a:p>
-            <a:pPr marL="342900" indent="-342900">
-              <a:spcAft>
-                <a:spcPts val="1400"/>
-              </a:spcAft>
-              <a:buSzPct val="100000"/>
-              <a:buChar char="•"/>
-            </a:pPr>
-            <a:r>
-              <a:rPr lang="en-US" sz="2400" dirty="0">
-                <a:solidFill>
-                  <a:srgbClr val="1F2937"/>
-                </a:solidFill>
-              </a:rPr>
-              <a:t>Trocar a ordem das dimensões em W</a:t>
-            </a:r>
-            <a:endParaRPr lang="en-US" sz="2400" dirty="0"/>
-          </a:p>
-          <a:p>
-            <a:pPr marL="342900" indent="-342900">
-              <a:spcAft>
-                <a:spcPts val="1400"/>
-              </a:spcAft>
-              <a:buSzPct val="100000"/>
-              <a:buChar char="•"/>
-            </a:pPr>
-            <a:r>
-              <a:rPr lang="en-US" sz="2400" dirty="0">
-                <a:solidFill>
-                  <a:srgbClr val="1F2937"/>
-                </a:solidFill>
-              </a:rPr>
-              <a:t>Esquecer f′(Z) na retropropagação</a:t>
-            </a:r>
-            <a:endParaRPr lang="en-US" sz="2400" dirty="0"/>
-          </a:p>
-          <a:p>
-            <a:pPr marL="342900" indent="-342900">
-              <a:spcAft>
-                <a:spcPts val="1400"/>
-              </a:spcAft>
-              <a:buSzPct val="100000"/>
-              <a:buChar char="•"/>
-            </a:pPr>
-            <a:r>
-              <a:rPr lang="en-US" sz="2400" dirty="0">
-                <a:solidFill>
-                  <a:srgbClr val="1F2937"/>
-                </a:solidFill>
-              </a:rPr>
-              <a:t>Não verificar o gradiente</a:t>
-            </a:r>
-            <a:endParaRPr lang="en-US" sz="2400" dirty="0"/>
-          </a:p>
-          <a:p>
-            <a:pPr marL="342900" indent="-342900">
-              <a:spcAft>
-                <a:spcPts val="1400"/>
-              </a:spcAft>
-              <a:buSzPct val="100000"/>
-              <a:buChar char="•"/>
-            </a:pPr>
-            <a:r>
-              <a:rPr lang="en-US" sz="2400" dirty="0">
-                <a:solidFill>
-                  <a:srgbClr val="1F2937"/>
-                </a:solidFill>
-              </a:rPr>
-              <a:t>Comparar perdas com fatores diferentes (½, 1/N)</a:t>
-            </a:r>
-            <a:endParaRPr lang="en-US" sz="2400" dirty="0"/>
+            <a:pPr algn="ctr" indent="0" marL="0">
+              <a:buNone/>
+            </a:pPr>
+            <a:r>
+              <a:rPr lang="en-US" sz="1400" i="1" dirty="0">
+                <a:solidFill>
+                  <a:srgbClr val="4B5563"/>
+                </a:solidFill>
+              </a:rPr>
+              <a:t>Compromisso entre ruído e custo por atualização.</a:t>
+            </a:r>
+            <a:endParaRPr lang="en-US" sz="1400" dirty="0"/>
           </a:p>
         </p:txBody>
       </p:sp>
@@ -2759,85 +3259,46 @@
                 <a:ea typeface="Calibri" pitchFamily="34" charset="-122"/>
                 <a:cs typeface="Calibri" pitchFamily="34" charset="-120"/>
               </a:rPr>
-              <a:t>Atividade</a:t>
+              <a:t>Divisão da amostra e vazamento</a:t>
             </a:r>
             <a:endParaRPr lang="en-US" sz="2600" dirty="0"/>
           </a:p>
         </p:txBody>
       </p:sp>
-      <p:sp>
-        <p:nvSpPr>
-          <p:cNvPr id="3" name="Shape 1"/>
-          <p:cNvSpPr/>
-          <p:nvPr/>
-        </p:nvSpPr>
-        <p:spPr>
-          <a:xfrm>
-            <a:off x="548640" y="1188720"/>
-            <a:ext cx="8046720" cy="3108960"/>
-          </a:xfrm>
-          <a:prstGeom prst="roundRect">
-            <a:avLst>
-              <a:gd name="adj" fmla="val 3529"/>
-            </a:avLst>
-          </a:prstGeom>
-          <a:solidFill>
-            <a:srgbClr val="FFFBEB"/>
-          </a:solidFill>
-          <a:ln w="25400">
-            <a:solidFill>
-              <a:srgbClr val="F59E0B"/>
-            </a:solidFill>
-            <a:prstDash val="solid"/>
-          </a:ln>
-        </p:spPr>
-      </p:sp>
-      <p:sp>
-        <p:nvSpPr>
-          <p:cNvPr id="4" name="Text 2"/>
+      <p:pic>
+        <p:nvPicPr>
+          <p:cNvPr id="3" name="Image 0" descr="Treino, validação e teste: o teste só no fim.">    </p:cNvPr>
+          <p:cNvPicPr>
+            <a:picLocks noChangeAspect="1"/>
+          </p:cNvPicPr>
+          <p:nvPr/>
+        </p:nvPicPr>
+        <p:blipFill>
+          <a:blip r:embed="rId1"/>
+          <a:stretch>
+            <a:fillRect/>
+          </a:stretch>
+        </p:blipFill>
+        <p:spPr>
+          <a:xfrm>
+            <a:off x="971140" y="1005840"/>
+            <a:ext cx="7201720" cy="3154680"/>
+          </a:xfrm>
+          <a:prstGeom prst="rect">
+            <a:avLst/>
+          </a:prstGeom>
+        </p:spPr>
+      </p:pic>
+      <p:sp>
+        <p:nvSpPr>
+          <p:cNvPr id="4" name="Text 1"/>
           <p:cNvSpPr txBox="1"/>
           <p:nvPr/>
         </p:nvSpPr>
         <p:spPr>
           <a:xfrm>
-            <a:off x="822960" y="1325880"/>
-            <a:ext cx="3657600" cy="365760"/>
-          </a:xfrm>
-          <a:prstGeom prst="rect">
-            <a:avLst/>
-          </a:prstGeom>
-          <a:noFill/>
-          <a:ln/>
-        </p:spPr>
-        <p:txBody>
-          <a:bodyPr wrap="square" lIns="0" tIns="0" rIns="0" bIns="0" rtlCol="0" anchor="ctr"/>
-          <a:lstStyle/>
-          <a:p>
-            <a:pPr indent="0" marL="0">
-              <a:buNone/>
-            </a:pPr>
-            <a:r>
-              <a:rPr lang="en-US" sz="1400" b="1" spc="300" kern="0" dirty="0">
-                <a:solidFill>
-                  <a:srgbClr val="B45309"/>
-                </a:solidFill>
-              </a:rPr>
-              <a:t>MÃO NA MASSA</a:t>
-            </a:r>
-            <a:endParaRPr lang="en-US" sz="1400" dirty="0"/>
-          </a:p>
-        </p:txBody>
-      </p:sp>
-      <p:sp>
-        <p:nvSpPr>
-          <p:cNvPr id="5" name="Text 3"/>
-          <p:cNvSpPr txBox="1"/>
-          <p:nvPr/>
-        </p:nvSpPr>
-        <p:spPr>
-          <a:xfrm>
-            <a:off x="822960" y="1783080"/>
-            <a:ext cx="7498080" cy="2377440"/>
+            <a:off x="457200" y="4251960"/>
+            <a:ext cx="8229600" cy="457200"/>
           </a:xfrm>
           <a:prstGeom prst="rect">
             <a:avLst/>
@@ -2851,18 +3312,18 @@
           </a:bodyPr>
           <a:lstStyle/>
           <a:p>
-            <a:pPr indent="0" marL="0">
+            <a:pPr algn="ctr" indent="0" marL="0">
               <a:buNone/>
             </a:pPr>
             <a:r>
-              <a:rPr lang="en-US" sz="2100" dirty="0">
-                <a:solidFill>
-                  <a:srgbClr val="1F2937"/>
-                </a:solidFill>
-              </a:rPr>
-              <a:t>Calcule à mão uma passagem direta e uma reversa para a rede 2–2–1 do capítulo. Depois confira com o código e com o gradiente numérico.</a:t>
-            </a:r>
-            <a:endParaRPr lang="en-US" sz="2100" dirty="0"/>
+              <a:rPr lang="en-US" sz="1400" i="1" dirty="0">
+                <a:solidFill>
+                  <a:srgbClr val="4B5563"/>
+                </a:solidFill>
+              </a:rPr>
+              <a:t>Treino, validação e teste: o teste só no fim.</a:t>
+            </a:r>
+            <a:endParaRPr lang="en-US" sz="1400" dirty="0"/>
           </a:p>
         </p:txBody>
       </p:sp>
@@ -2944,6 +3405,1450 @@
         </p:nvSpPr>
         <p:spPr>
           <a:xfrm>
+            <a:off x="365760" y="109728"/>
+            <a:ext cx="8412480" cy="658368"/>
+          </a:xfrm>
+          <a:prstGeom prst="rect">
+            <a:avLst/>
+          </a:prstGeom>
+          <a:noFill/>
+          <a:ln/>
+        </p:spPr>
+        <p:txBody>
+          <a:bodyPr wrap="square" lIns="0" tIns="0" rIns="0" bIns="0" rtlCol="0" anchor="ctr">
+            <a:normAutofit/>
+          </a:bodyPr>
+          <a:lstStyle/>
+          <a:p>
+            <a:pPr indent="0" marL="0">
+              <a:buNone/>
+            </a:pPr>
+            <a:r>
+              <a:rPr lang="en-US" sz="2600" b="1" dirty="0">
+                <a:solidFill>
+                  <a:srgbClr val="FFFFFF"/>
+                </a:solidFill>
+                <a:latin typeface="Calibri" pitchFamily="34" charset="0"/>
+                <a:ea typeface="Calibri" pitchFamily="34" charset="-122"/>
+                <a:cs typeface="Calibri" pitchFamily="34" charset="-120"/>
+              </a:rPr>
+              <a:t>Erros frequentes</a:t>
+            </a:r>
+            <a:endParaRPr lang="en-US" sz="2600" dirty="0"/>
+          </a:p>
+        </p:txBody>
+      </p:sp>
+      <p:sp>
+        <p:nvSpPr>
+          <p:cNvPr id="3" name="Text 1"/>
+          <p:cNvSpPr txBox="1"/>
+          <p:nvPr/>
+        </p:nvSpPr>
+        <p:spPr>
+          <a:xfrm>
+            <a:off x="548640" y="1188720"/>
+            <a:ext cx="8046720" cy="3383280"/>
+          </a:xfrm>
+          <a:prstGeom prst="rect">
+            <a:avLst/>
+          </a:prstGeom>
+          <a:noFill/>
+          <a:ln/>
+        </p:spPr>
+        <p:txBody>
+          <a:bodyPr wrap="square" lIns="0" tIns="0" rIns="0" bIns="0" rtlCol="0" anchor="t">
+            <a:normAutofit/>
+          </a:bodyPr>
+          <a:lstStyle/>
+          <a:p>
+            <a:pPr marL="342900" indent="-342900">
+              <a:spcAft>
+                <a:spcPts val="1400"/>
+              </a:spcAft>
+              <a:buSzPct val="100000"/>
+              <a:buChar char="•"/>
+            </a:pPr>
+            <a:r>
+              <a:rPr lang="en-US" sz="2400" dirty="0">
+                <a:solidFill>
+                  <a:srgbClr val="1F2937"/>
+                </a:solidFill>
+              </a:rPr>
+              <a:t>Trocar a ordem das dimensões em W</a:t>
+            </a:r>
+            <a:endParaRPr lang="en-US" sz="2400" dirty="0"/>
+          </a:p>
+          <a:p>
+            <a:pPr marL="342900" indent="-342900">
+              <a:spcAft>
+                <a:spcPts val="1400"/>
+              </a:spcAft>
+              <a:buSzPct val="100000"/>
+              <a:buChar char="•"/>
+            </a:pPr>
+            <a:r>
+              <a:rPr lang="en-US" sz="2400" dirty="0">
+                <a:solidFill>
+                  <a:srgbClr val="1F2937"/>
+                </a:solidFill>
+              </a:rPr>
+              <a:t>Esquecer f′(Z) na retropropagação</a:t>
+            </a:r>
+            <a:endParaRPr lang="en-US" sz="2400" dirty="0"/>
+          </a:p>
+          <a:p>
+            <a:pPr marL="342900" indent="-342900">
+              <a:spcAft>
+                <a:spcPts val="1400"/>
+              </a:spcAft>
+              <a:buSzPct val="100000"/>
+              <a:buChar char="•"/>
+            </a:pPr>
+            <a:r>
+              <a:rPr lang="en-US" sz="2400" dirty="0">
+                <a:solidFill>
+                  <a:srgbClr val="1F2937"/>
+                </a:solidFill>
+              </a:rPr>
+              <a:t>Não verificar o gradiente</a:t>
+            </a:r>
+            <a:endParaRPr lang="en-US" sz="2400" dirty="0"/>
+          </a:p>
+          <a:p>
+            <a:pPr marL="342900" indent="-342900">
+              <a:spcAft>
+                <a:spcPts val="1400"/>
+              </a:spcAft>
+              <a:buSzPct val="100000"/>
+              <a:buChar char="•"/>
+            </a:pPr>
+            <a:r>
+              <a:rPr lang="en-US" sz="2400" dirty="0">
+                <a:solidFill>
+                  <a:srgbClr val="1F2937"/>
+                </a:solidFill>
+              </a:rPr>
+              <a:t>Comparar perdas com fatores diferentes (½, 1/N)</a:t>
+            </a:r>
+            <a:endParaRPr lang="en-US" sz="2400" dirty="0"/>
+          </a:p>
+        </p:txBody>
+      </p:sp>
+      <p:sp>
+        <p:nvSpPr>
+          <p:cNvPr id="25" name="Slide Number Placeholder 0"/>
+          <p:cNvSpPr>
+            <a:spLocks noGrp="1"/>
+          </p:cNvSpPr>
+          <p:nvPr>
+            <p:ph type="sldNum" sz="quarter" idx="4294967295"/>
+          </p:nvPr>
+        </p:nvSpPr>
+        <p:spPr>
+          <a:xfrm>
+            <a:off x="8412480" y="4828032"/>
+            <a:ext cx="457200" cy="228600"/>
+          </a:xfrm>
+          <a:prstGeom prst="rect">
+            <a:avLst/>
+          </a:prstGeom>
+          <a:extLst>
+            <a:ext uri="{C572A759-6A51-4108-AA02-DFA0A04FC94B}">
+              <ma14:wrappingTextBoxFlag xmlns:ma14="http://schemas.microsoft.com/office/mac/drawingml/2011/main" val="0"/>
+            </a:ext>
+          </a:extLst>
+        </p:spPr>
+        <p:txBody>
+          <a:bodyPr/>
+          <a:lstStyle>
+            <a:lvl1pPr>
+              <a:defRPr sz="900">
+                <a:solidFill>
+                  <a:srgbClr val="6B7280"/>
+                </a:solidFill>
+              </a:defRPr>
+            </a:lvl1pPr>
+          </a:lstStyle>
+          <a:p>
+            <a:pPr algn="l"/>
+            <a:fld id="{F7021451-1387-4CA6-816F-3879F97B5CBC}" type="slidenum">
+              <a:rPr b="0" lang="en-US"/>
+              <a:t>13</a:t>
+            </a:fld>
+            <a:endParaRPr lang="en-US"/>
+          </a:p>
+        </p:txBody>
+      </p:sp>
+    </p:spTree>
+  </p:cSld>
+  <p:clrMapOvr>
+    <a:masterClrMapping/>
+  </p:clrMapOvr>
+</p:sld>
+</file>
+
+<file path=ppt/slides/slide14.xml><?xml version="1.0" encoding="utf-8"?>
+<p:sld xmlns:a="http://schemas.openxmlformats.org/drawingml/2006/main" xmlns:r="http://schemas.openxmlformats.org/officeDocument/2006/relationships" xmlns:p="http://schemas.openxmlformats.org/presentationml/2006/main">
+  <p:cSld name="Slide 14">
+    <p:spTree>
+      <p:nvGrpSpPr>
+        <p:cNvPr id="1" name=""/>
+        <p:cNvGrpSpPr/>
+        <p:nvPr/>
+      </p:nvGrpSpPr>
+      <p:grpSpPr>
+        <a:xfrm>
+          <a:off x="0" y="0"/>
+          <a:ext cx="0" cy="0"/>
+          <a:chOff x="0" y="0"/>
+          <a:chExt cx="0" cy="0"/>
+        </a:xfrm>
+      </p:grpSpPr>
+      <p:sp>
+        <p:nvSpPr>
+          <p:cNvPr id="2" name="Text 0"/>
+          <p:cNvSpPr txBox="1"/>
+          <p:nvPr/>
+        </p:nvSpPr>
+        <p:spPr>
+          <a:xfrm>
+            <a:off x="365760" y="109728"/>
+            <a:ext cx="8412480" cy="658368"/>
+          </a:xfrm>
+          <a:prstGeom prst="rect">
+            <a:avLst/>
+          </a:prstGeom>
+          <a:noFill/>
+          <a:ln/>
+        </p:spPr>
+        <p:txBody>
+          <a:bodyPr wrap="square" lIns="0" tIns="0" rIns="0" bIns="0" rtlCol="0" anchor="ctr">
+            <a:normAutofit/>
+          </a:bodyPr>
+          <a:lstStyle/>
+          <a:p>
+            <a:pPr indent="0" marL="0">
+              <a:buNone/>
+            </a:pPr>
+            <a:r>
+              <a:rPr lang="en-US" sz="2600" b="1" dirty="0">
+                <a:solidFill>
+                  <a:srgbClr val="FFFFFF"/>
+                </a:solidFill>
+                <a:latin typeface="Calibri" pitchFamily="34" charset="0"/>
+                <a:ea typeface="Calibri" pitchFamily="34" charset="-122"/>
+                <a:cs typeface="Calibri" pitchFamily="34" charset="-120"/>
+              </a:rPr>
+              <a:t>Ativações e suas derivadas</a:t>
+            </a:r>
+            <a:endParaRPr lang="en-US" sz="2600" dirty="0"/>
+          </a:p>
+        </p:txBody>
+      </p:sp>
+      <p:sp>
+        <p:nvSpPr>
+          <p:cNvPr id="3" name="Text 1"/>
+          <p:cNvSpPr txBox="1"/>
+          <p:nvPr/>
+        </p:nvSpPr>
+        <p:spPr>
+          <a:xfrm>
+            <a:off x="548640" y="1188720"/>
+            <a:ext cx="8046720" cy="3383280"/>
+          </a:xfrm>
+          <a:prstGeom prst="rect">
+            <a:avLst/>
+          </a:prstGeom>
+          <a:noFill/>
+          <a:ln/>
+        </p:spPr>
+        <p:txBody>
+          <a:bodyPr wrap="square" lIns="0" tIns="0" rIns="0" bIns="0" rtlCol="0" anchor="t">
+            <a:normAutofit/>
+          </a:bodyPr>
+          <a:lstStyle/>
+          <a:p>
+            <a:pPr marL="342900" indent="-342900">
+              <a:spcAft>
+                <a:spcPts val="1400"/>
+              </a:spcAft>
+              <a:buSzPct val="100000"/>
+              <a:buChar char="•"/>
+            </a:pPr>
+            <a:r>
+              <a:rPr lang="en-US" sz="2400" dirty="0">
+                <a:solidFill>
+                  <a:srgbClr val="1F2937"/>
+                </a:solidFill>
+              </a:rPr>
+              <a:t>Sigmoide: σ′ = σ(1 − σ), no máximo 0,25</a:t>
+            </a:r>
+            <a:endParaRPr lang="en-US" sz="2400" dirty="0"/>
+          </a:p>
+          <a:p>
+            <a:pPr marL="342900" indent="-342900">
+              <a:spcAft>
+                <a:spcPts val="1400"/>
+              </a:spcAft>
+              <a:buSzPct val="100000"/>
+              <a:buChar char="•"/>
+            </a:pPr>
+            <a:r>
+              <a:rPr lang="en-US" sz="2400" dirty="0">
+                <a:solidFill>
+                  <a:srgbClr val="1F2937"/>
+                </a:solidFill>
+              </a:rPr>
+              <a:t>Tanh: tanh′ = 1 − tanh², no máximo 1</a:t>
+            </a:r>
+            <a:endParaRPr lang="en-US" sz="2400" dirty="0"/>
+          </a:p>
+          <a:p>
+            <a:pPr marL="342900" indent="-342900">
+              <a:spcAft>
+                <a:spcPts val="1400"/>
+              </a:spcAft>
+              <a:buSzPct val="100000"/>
+              <a:buChar char="•"/>
+            </a:pPr>
+            <a:r>
+              <a:rPr lang="en-US" sz="2400" dirty="0">
+                <a:solidFill>
+                  <a:srgbClr val="1F2937"/>
+                </a:solidFill>
+              </a:rPr>
+              <a:t>ReLU: derivada 0 ou 1</a:t>
+            </a:r>
+            <a:endParaRPr lang="en-US" sz="2400" dirty="0"/>
+          </a:p>
+          <a:p>
+            <a:pPr marL="342900" indent="-342900">
+              <a:spcAft>
+                <a:spcPts val="1400"/>
+              </a:spcAft>
+              <a:buSzPct val="100000"/>
+              <a:buChar char="•"/>
+            </a:pPr>
+            <a:r>
+              <a:rPr lang="en-US" sz="2400" dirty="0">
+                <a:solidFill>
+                  <a:srgbClr val="1F2937"/>
+                </a:solidFill>
+              </a:rPr>
+              <a:t>Derivada pequena em muitas camadas: gradiente que desaparece</a:t>
+            </a:r>
+            <a:endParaRPr lang="en-US" sz="2400" dirty="0"/>
+          </a:p>
+        </p:txBody>
+      </p:sp>
+      <p:sp>
+        <p:nvSpPr>
+          <p:cNvPr id="25" name="Slide Number Placeholder 0"/>
+          <p:cNvSpPr>
+            <a:spLocks noGrp="1"/>
+          </p:cNvSpPr>
+          <p:nvPr>
+            <p:ph type="sldNum" sz="quarter" idx="4294967295"/>
+          </p:nvPr>
+        </p:nvSpPr>
+        <p:spPr>
+          <a:xfrm>
+            <a:off x="8412480" y="4828032"/>
+            <a:ext cx="457200" cy="228600"/>
+          </a:xfrm>
+          <a:prstGeom prst="rect">
+            <a:avLst/>
+          </a:prstGeom>
+          <a:extLst>
+            <a:ext uri="{C572A759-6A51-4108-AA02-DFA0A04FC94B}">
+              <ma14:wrappingTextBoxFlag xmlns:ma14="http://schemas.microsoft.com/office/mac/drawingml/2011/main" val="0"/>
+            </a:ext>
+          </a:extLst>
+        </p:spPr>
+        <p:txBody>
+          <a:bodyPr/>
+          <a:lstStyle>
+            <a:lvl1pPr>
+              <a:defRPr sz="900">
+                <a:solidFill>
+                  <a:srgbClr val="6B7280"/>
+                </a:solidFill>
+              </a:defRPr>
+            </a:lvl1pPr>
+          </a:lstStyle>
+          <a:p>
+            <a:pPr algn="l"/>
+            <a:fld id="{F7021451-1387-4CA6-816F-3879F97B5CBC}" type="slidenum">
+              <a:rPr b="0" lang="en-US"/>
+              <a:t>14</a:t>
+            </a:fld>
+            <a:endParaRPr lang="en-US"/>
+          </a:p>
+        </p:txBody>
+      </p:sp>
+    </p:spTree>
+  </p:cSld>
+  <p:clrMapOvr>
+    <a:masterClrMapping/>
+  </p:clrMapOvr>
+</p:sld>
+</file>
+
+<file path=ppt/slides/slide15.xml><?xml version="1.0" encoding="utf-8"?>
+<p:sld xmlns:a="http://schemas.openxmlformats.org/drawingml/2006/main" xmlns:r="http://schemas.openxmlformats.org/officeDocument/2006/relationships" xmlns:p="http://schemas.openxmlformats.org/presentationml/2006/main">
+  <p:cSld name="Slide 15">
+    <p:spTree>
+      <p:nvGrpSpPr>
+        <p:cNvPr id="1" name=""/>
+        <p:cNvGrpSpPr/>
+        <p:nvPr/>
+      </p:nvGrpSpPr>
+      <p:grpSpPr>
+        <a:xfrm>
+          <a:off x="0" y="0"/>
+          <a:ext cx="0" cy="0"/>
+          <a:chOff x="0" y="0"/>
+          <a:chExt cx="0" cy="0"/>
+        </a:xfrm>
+      </p:grpSpPr>
+      <p:sp>
+        <p:nvSpPr>
+          <p:cNvPr id="2" name="Text 0"/>
+          <p:cNvSpPr txBox="1"/>
+          <p:nvPr/>
+        </p:nvSpPr>
+        <p:spPr>
+          <a:xfrm>
+            <a:off x="365760" y="109728"/>
+            <a:ext cx="8412480" cy="658368"/>
+          </a:xfrm>
+          <a:prstGeom prst="rect">
+            <a:avLst/>
+          </a:prstGeom>
+          <a:noFill/>
+          <a:ln/>
+        </p:spPr>
+        <p:txBody>
+          <a:bodyPr wrap="square" lIns="0" tIns="0" rIns="0" bIns="0" rtlCol="0" anchor="ctr">
+            <a:normAutofit/>
+          </a:bodyPr>
+          <a:lstStyle/>
+          <a:p>
+            <a:pPr indent="0" marL="0">
+              <a:buNone/>
+            </a:pPr>
+            <a:r>
+              <a:rPr lang="en-US" sz="2600" b="1" dirty="0">
+                <a:solidFill>
+                  <a:srgbClr val="FFFFFF"/>
+                </a:solidFill>
+                <a:latin typeface="Calibri" pitchFamily="34" charset="0"/>
+                <a:ea typeface="Calibri" pitchFamily="34" charset="-122"/>
+                <a:cs typeface="Calibri" pitchFamily="34" charset="-120"/>
+              </a:rPr>
+              <a:t>Quiz relâmpago 1</a:t>
+            </a:r>
+            <a:endParaRPr lang="en-US" sz="2600" dirty="0"/>
+          </a:p>
+        </p:txBody>
+      </p:sp>
+      <p:sp>
+        <p:nvSpPr>
+          <p:cNvPr id="3" name="Text 1"/>
+          <p:cNvSpPr txBox="1"/>
+          <p:nvPr/>
+        </p:nvSpPr>
+        <p:spPr>
+          <a:xfrm>
+            <a:off x="548640" y="1051560"/>
+            <a:ext cx="8046720" cy="822960"/>
+          </a:xfrm>
+          <a:prstGeom prst="rect">
+            <a:avLst/>
+          </a:prstGeom>
+          <a:noFill/>
+          <a:ln/>
+        </p:spPr>
+        <p:txBody>
+          <a:bodyPr wrap="square" lIns="0" tIns="0" rIns="0" bIns="0" rtlCol="0" anchor="ctr">
+            <a:normAutofit/>
+          </a:bodyPr>
+          <a:lstStyle/>
+          <a:p>
+            <a:pPr indent="0" marL="0">
+              <a:buNone/>
+            </a:pPr>
+            <a:r>
+              <a:rPr lang="en-US" sz="2200" b="1" dirty="0">
+                <a:solidFill>
+                  <a:srgbClr val="312E81"/>
+                </a:solidFill>
+              </a:rPr>
+              <a:t>Com entropia cruzada e saída sigmoide, o δ da saída vale:</a:t>
+            </a:r>
+            <a:endParaRPr lang="en-US" sz="2200" dirty="0"/>
+          </a:p>
+        </p:txBody>
+      </p:sp>
+      <p:sp>
+        <p:nvSpPr>
+          <p:cNvPr id="4" name="Shape 2"/>
+          <p:cNvSpPr/>
+          <p:nvPr/>
+        </p:nvSpPr>
+        <p:spPr>
+          <a:xfrm>
+            <a:off x="548640" y="1965960"/>
+            <a:ext cx="8046720" cy="548640"/>
+          </a:xfrm>
+          <a:prstGeom prst="roundRect">
+            <a:avLst>
+              <a:gd name="adj" fmla="val 13333"/>
+            </a:avLst>
+          </a:prstGeom>
+          <a:solidFill>
+            <a:srgbClr val="EEF2FF"/>
+          </a:solidFill>
+          <a:ln w="12700">
+            <a:solidFill>
+              <a:srgbClr val="C7D2FE"/>
+            </a:solidFill>
+            <a:prstDash val="solid"/>
+          </a:ln>
+        </p:spPr>
+      </p:sp>
+      <p:sp>
+        <p:nvSpPr>
+          <p:cNvPr id="5" name="Text 3"/>
+          <p:cNvSpPr txBox="1"/>
+          <p:nvPr/>
+        </p:nvSpPr>
+        <p:spPr>
+          <a:xfrm>
+            <a:off x="777240" y="1965960"/>
+            <a:ext cx="7680960" cy="548640"/>
+          </a:xfrm>
+          <a:prstGeom prst="rect">
+            <a:avLst/>
+          </a:prstGeom>
+          <a:noFill/>
+          <a:ln/>
+        </p:spPr>
+        <p:txBody>
+          <a:bodyPr wrap="square" lIns="0" tIns="0" rIns="0" bIns="0" rtlCol="0" anchor="ctr">
+            <a:normAutofit/>
+          </a:bodyPr>
+          <a:lstStyle/>
+          <a:p>
+            <a:pPr indent="0" marL="0">
+              <a:buNone/>
+            </a:pPr>
+            <a:r>
+              <a:rPr lang="en-US" sz="1800" dirty="0">
+                <a:solidFill>
+                  <a:srgbClr val="1F2937"/>
+                </a:solidFill>
+              </a:rPr>
+              <a:t>A)  y − t</a:t>
+            </a:r>
+            <a:endParaRPr lang="en-US" sz="1800" dirty="0"/>
+          </a:p>
+        </p:txBody>
+      </p:sp>
+      <p:sp>
+        <p:nvSpPr>
+          <p:cNvPr id="6" name="Shape 4"/>
+          <p:cNvSpPr/>
+          <p:nvPr/>
+        </p:nvSpPr>
+        <p:spPr>
+          <a:xfrm>
+            <a:off x="548640" y="2606040"/>
+            <a:ext cx="8046720" cy="548640"/>
+          </a:xfrm>
+          <a:prstGeom prst="roundRect">
+            <a:avLst>
+              <a:gd name="adj" fmla="val 13333"/>
+            </a:avLst>
+          </a:prstGeom>
+          <a:solidFill>
+            <a:srgbClr val="EEF2FF"/>
+          </a:solidFill>
+          <a:ln w="12700">
+            <a:solidFill>
+              <a:srgbClr val="C7D2FE"/>
+            </a:solidFill>
+            <a:prstDash val="solid"/>
+          </a:ln>
+        </p:spPr>
+      </p:sp>
+      <p:sp>
+        <p:nvSpPr>
+          <p:cNvPr id="7" name="Text 5"/>
+          <p:cNvSpPr txBox="1"/>
+          <p:nvPr/>
+        </p:nvSpPr>
+        <p:spPr>
+          <a:xfrm>
+            <a:off x="777240" y="2606040"/>
+            <a:ext cx="7680960" cy="548640"/>
+          </a:xfrm>
+          <a:prstGeom prst="rect">
+            <a:avLst/>
+          </a:prstGeom>
+          <a:noFill/>
+          <a:ln/>
+        </p:spPr>
+        <p:txBody>
+          <a:bodyPr wrap="square" lIns="0" tIns="0" rIns="0" bIns="0" rtlCol="0" anchor="ctr">
+            <a:normAutofit/>
+          </a:bodyPr>
+          <a:lstStyle/>
+          <a:p>
+            <a:pPr indent="0" marL="0">
+              <a:buNone/>
+            </a:pPr>
+            <a:r>
+              <a:rPr lang="en-US" sz="1800" dirty="0">
+                <a:solidFill>
+                  <a:srgbClr val="1F2937"/>
+                </a:solidFill>
+              </a:rPr>
+              <a:t>B)  (y − t)·y(1 − y)</a:t>
+            </a:r>
+            <a:endParaRPr lang="en-US" sz="1800" dirty="0"/>
+          </a:p>
+        </p:txBody>
+      </p:sp>
+      <p:sp>
+        <p:nvSpPr>
+          <p:cNvPr id="8" name="Shape 6"/>
+          <p:cNvSpPr/>
+          <p:nvPr/>
+        </p:nvSpPr>
+        <p:spPr>
+          <a:xfrm>
+            <a:off x="548640" y="3246120"/>
+            <a:ext cx="8046720" cy="548640"/>
+          </a:xfrm>
+          <a:prstGeom prst="roundRect">
+            <a:avLst>
+              <a:gd name="adj" fmla="val 13333"/>
+            </a:avLst>
+          </a:prstGeom>
+          <a:solidFill>
+            <a:srgbClr val="EEF2FF"/>
+          </a:solidFill>
+          <a:ln w="12700">
+            <a:solidFill>
+              <a:srgbClr val="C7D2FE"/>
+            </a:solidFill>
+            <a:prstDash val="solid"/>
+          </a:ln>
+        </p:spPr>
+      </p:sp>
+      <p:sp>
+        <p:nvSpPr>
+          <p:cNvPr id="9" name="Text 7"/>
+          <p:cNvSpPr txBox="1"/>
+          <p:nvPr/>
+        </p:nvSpPr>
+        <p:spPr>
+          <a:xfrm>
+            <a:off x="777240" y="3246120"/>
+            <a:ext cx="7680960" cy="548640"/>
+          </a:xfrm>
+          <a:prstGeom prst="rect">
+            <a:avLst/>
+          </a:prstGeom>
+          <a:noFill/>
+          <a:ln/>
+        </p:spPr>
+        <p:txBody>
+          <a:bodyPr wrap="square" lIns="0" tIns="0" rIns="0" bIns="0" rtlCol="0" anchor="ctr">
+            <a:normAutofit/>
+          </a:bodyPr>
+          <a:lstStyle/>
+          <a:p>
+            <a:pPr indent="0" marL="0">
+              <a:buNone/>
+            </a:pPr>
+            <a:r>
+              <a:rPr lang="en-US" sz="1800" dirty="0">
+                <a:solidFill>
+                  <a:srgbClr val="1F2937"/>
+                </a:solidFill>
+              </a:rPr>
+              <a:t>C)  t − y²</a:t>
+            </a:r>
+            <a:endParaRPr lang="en-US" sz="1800" dirty="0"/>
+          </a:p>
+        </p:txBody>
+      </p:sp>
+      <p:sp>
+        <p:nvSpPr>
+          <p:cNvPr id="10" name="Shape 8"/>
+          <p:cNvSpPr/>
+          <p:nvPr/>
+        </p:nvSpPr>
+        <p:spPr>
+          <a:xfrm>
+            <a:off x="548640" y="3886200"/>
+            <a:ext cx="8046720" cy="548640"/>
+          </a:xfrm>
+          <a:prstGeom prst="roundRect">
+            <a:avLst>
+              <a:gd name="adj" fmla="val 13333"/>
+            </a:avLst>
+          </a:prstGeom>
+          <a:solidFill>
+            <a:srgbClr val="EEF2FF"/>
+          </a:solidFill>
+          <a:ln w="12700">
+            <a:solidFill>
+              <a:srgbClr val="C7D2FE"/>
+            </a:solidFill>
+            <a:prstDash val="solid"/>
+          </a:ln>
+        </p:spPr>
+      </p:sp>
+      <p:sp>
+        <p:nvSpPr>
+          <p:cNvPr id="11" name="Text 9"/>
+          <p:cNvSpPr txBox="1"/>
+          <p:nvPr/>
+        </p:nvSpPr>
+        <p:spPr>
+          <a:xfrm>
+            <a:off x="777240" y="3886200"/>
+            <a:ext cx="7680960" cy="548640"/>
+          </a:xfrm>
+          <a:prstGeom prst="rect">
+            <a:avLst/>
+          </a:prstGeom>
+          <a:noFill/>
+          <a:ln/>
+        </p:spPr>
+        <p:txBody>
+          <a:bodyPr wrap="square" lIns="0" tIns="0" rIns="0" bIns="0" rtlCol="0" anchor="ctr">
+            <a:normAutofit/>
+          </a:bodyPr>
+          <a:lstStyle/>
+          <a:p>
+            <a:pPr indent="0" marL="0">
+              <a:buNone/>
+            </a:pPr>
+            <a:r>
+              <a:rPr lang="en-US" sz="1800" dirty="0">
+                <a:solidFill>
+                  <a:srgbClr val="1F2937"/>
+                </a:solidFill>
+              </a:rPr>
+              <a:t>D)  y·t</a:t>
+            </a:r>
+            <a:endParaRPr lang="en-US" sz="1800" dirty="0"/>
+          </a:p>
+        </p:txBody>
+      </p:sp>
+      <p:sp>
+        <p:nvSpPr>
+          <p:cNvPr id="25" name="Slide Number Placeholder 0"/>
+          <p:cNvSpPr>
+            <a:spLocks noGrp="1"/>
+          </p:cNvSpPr>
+          <p:nvPr>
+            <p:ph type="sldNum" sz="quarter" idx="4294967295"/>
+          </p:nvPr>
+        </p:nvSpPr>
+        <p:spPr>
+          <a:xfrm>
+            <a:off x="8412480" y="4828032"/>
+            <a:ext cx="457200" cy="228600"/>
+          </a:xfrm>
+          <a:prstGeom prst="rect">
+            <a:avLst/>
+          </a:prstGeom>
+          <a:extLst>
+            <a:ext uri="{C572A759-6A51-4108-AA02-DFA0A04FC94B}">
+              <ma14:wrappingTextBoxFlag xmlns:ma14="http://schemas.microsoft.com/office/mac/drawingml/2011/main" val="0"/>
+            </a:ext>
+          </a:extLst>
+        </p:spPr>
+        <p:txBody>
+          <a:bodyPr/>
+          <a:lstStyle>
+            <a:lvl1pPr>
+              <a:defRPr sz="900">
+                <a:solidFill>
+                  <a:srgbClr val="6B7280"/>
+                </a:solidFill>
+              </a:defRPr>
+            </a:lvl1pPr>
+          </a:lstStyle>
+          <a:p>
+            <a:pPr algn="l"/>
+            <a:fld id="{F7021451-1387-4CA6-816F-3879F97B5CBC}" type="slidenum">
+              <a:rPr b="0" lang="en-US"/>
+              <a:t>15</a:t>
+            </a:fld>
+            <a:endParaRPr lang="en-US"/>
+          </a:p>
+        </p:txBody>
+      </p:sp>
+    </p:spTree>
+  </p:cSld>
+  <p:clrMapOvr>
+    <a:masterClrMapping/>
+  </p:clrMapOvr>
+</p:sld>
+</file>
+
+<file path=ppt/slides/slide16.xml><?xml version="1.0" encoding="utf-8"?>
+<p:sld xmlns:a="http://schemas.openxmlformats.org/drawingml/2006/main" xmlns:r="http://schemas.openxmlformats.org/officeDocument/2006/relationships" xmlns:p="http://schemas.openxmlformats.org/presentationml/2006/main">
+  <p:cSld name="Slide 16">
+    <p:spTree>
+      <p:nvGrpSpPr>
+        <p:cNvPr id="1" name=""/>
+        <p:cNvGrpSpPr/>
+        <p:nvPr/>
+      </p:nvGrpSpPr>
+      <p:grpSpPr>
+        <a:xfrm>
+          <a:off x="0" y="0"/>
+          <a:ext cx="0" cy="0"/>
+          <a:chOff x="0" y="0"/>
+          <a:chExt cx="0" cy="0"/>
+        </a:xfrm>
+      </p:grpSpPr>
+      <p:sp>
+        <p:nvSpPr>
+          <p:cNvPr id="2" name="Text 0"/>
+          <p:cNvSpPr txBox="1"/>
+          <p:nvPr/>
+        </p:nvSpPr>
+        <p:spPr>
+          <a:xfrm>
+            <a:off x="365760" y="109728"/>
+            <a:ext cx="8412480" cy="658368"/>
+          </a:xfrm>
+          <a:prstGeom prst="rect">
+            <a:avLst/>
+          </a:prstGeom>
+          <a:noFill/>
+          <a:ln/>
+        </p:spPr>
+        <p:txBody>
+          <a:bodyPr wrap="square" lIns="0" tIns="0" rIns="0" bIns="0" rtlCol="0" anchor="ctr">
+            <a:normAutofit/>
+          </a:bodyPr>
+          <a:lstStyle/>
+          <a:p>
+            <a:pPr indent="0" marL="0">
+              <a:buNone/>
+            </a:pPr>
+            <a:r>
+              <a:rPr lang="en-US" sz="2600" b="1" dirty="0">
+                <a:solidFill>
+                  <a:srgbClr val="FFFFFF"/>
+                </a:solidFill>
+                <a:latin typeface="Calibri" pitchFamily="34" charset="0"/>
+                <a:ea typeface="Calibri" pitchFamily="34" charset="-122"/>
+                <a:cs typeface="Calibri" pitchFamily="34" charset="-120"/>
+              </a:rPr>
+              <a:t>Quiz relâmpago 2</a:t>
+            </a:r>
+            <a:endParaRPr lang="en-US" sz="2600" dirty="0"/>
+          </a:p>
+        </p:txBody>
+      </p:sp>
+      <p:sp>
+        <p:nvSpPr>
+          <p:cNvPr id="3" name="Text 1"/>
+          <p:cNvSpPr txBox="1"/>
+          <p:nvPr/>
+        </p:nvSpPr>
+        <p:spPr>
+          <a:xfrm>
+            <a:off x="548640" y="1051560"/>
+            <a:ext cx="8046720" cy="822960"/>
+          </a:xfrm>
+          <a:prstGeom prst="rect">
+            <a:avLst/>
+          </a:prstGeom>
+          <a:noFill/>
+          <a:ln/>
+        </p:spPr>
+        <p:txBody>
+          <a:bodyPr wrap="square" lIns="0" tIns="0" rIns="0" bIns="0" rtlCol="0" anchor="ctr">
+            <a:normAutofit/>
+          </a:bodyPr>
+          <a:lstStyle/>
+          <a:p>
+            <a:pPr indent="0" marL="0">
+              <a:buNone/>
+            </a:pPr>
+            <a:r>
+              <a:rPr lang="en-US" sz="2200" b="1" dirty="0">
+                <a:solidFill>
+                  <a:srgbClr val="312E81"/>
+                </a:solidFill>
+              </a:rPr>
+              <a:t>Qual erro leva a um desempenho otimista demais?</a:t>
+            </a:r>
+            <a:endParaRPr lang="en-US" sz="2200" dirty="0"/>
+          </a:p>
+        </p:txBody>
+      </p:sp>
+      <p:sp>
+        <p:nvSpPr>
+          <p:cNvPr id="4" name="Shape 2"/>
+          <p:cNvSpPr/>
+          <p:nvPr/>
+        </p:nvSpPr>
+        <p:spPr>
+          <a:xfrm>
+            <a:off x="548640" y="1965960"/>
+            <a:ext cx="8046720" cy="548640"/>
+          </a:xfrm>
+          <a:prstGeom prst="roundRect">
+            <a:avLst>
+              <a:gd name="adj" fmla="val 13333"/>
+            </a:avLst>
+          </a:prstGeom>
+          <a:solidFill>
+            <a:srgbClr val="EEF2FF"/>
+          </a:solidFill>
+          <a:ln w="12700">
+            <a:solidFill>
+              <a:srgbClr val="C7D2FE"/>
+            </a:solidFill>
+            <a:prstDash val="solid"/>
+          </a:ln>
+        </p:spPr>
+      </p:sp>
+      <p:sp>
+        <p:nvSpPr>
+          <p:cNvPr id="5" name="Text 3"/>
+          <p:cNvSpPr txBox="1"/>
+          <p:nvPr/>
+        </p:nvSpPr>
+        <p:spPr>
+          <a:xfrm>
+            <a:off x="777240" y="1965960"/>
+            <a:ext cx="7680960" cy="548640"/>
+          </a:xfrm>
+          <a:prstGeom prst="rect">
+            <a:avLst/>
+          </a:prstGeom>
+          <a:noFill/>
+          <a:ln/>
+        </p:spPr>
+        <p:txBody>
+          <a:bodyPr wrap="square" lIns="0" tIns="0" rIns="0" bIns="0" rtlCol="0" anchor="ctr">
+            <a:normAutofit/>
+          </a:bodyPr>
+          <a:lstStyle/>
+          <a:p>
+            <a:pPr indent="0" marL="0">
+              <a:buNone/>
+            </a:pPr>
+            <a:r>
+              <a:rPr lang="en-US" sz="1800" dirty="0">
+                <a:solidFill>
+                  <a:srgbClr val="1F2937"/>
+                </a:solidFill>
+              </a:rPr>
+              <a:t>A)  Escalar os dados antes de dividir treino e teste</a:t>
+            </a:r>
+            <a:endParaRPr lang="en-US" sz="1800" dirty="0"/>
+          </a:p>
+        </p:txBody>
+      </p:sp>
+      <p:sp>
+        <p:nvSpPr>
+          <p:cNvPr id="6" name="Shape 4"/>
+          <p:cNvSpPr/>
+          <p:nvPr/>
+        </p:nvSpPr>
+        <p:spPr>
+          <a:xfrm>
+            <a:off x="548640" y="2606040"/>
+            <a:ext cx="8046720" cy="548640"/>
+          </a:xfrm>
+          <a:prstGeom prst="roundRect">
+            <a:avLst>
+              <a:gd name="adj" fmla="val 13333"/>
+            </a:avLst>
+          </a:prstGeom>
+          <a:solidFill>
+            <a:srgbClr val="EEF2FF"/>
+          </a:solidFill>
+          <a:ln w="12700">
+            <a:solidFill>
+              <a:srgbClr val="C7D2FE"/>
+            </a:solidFill>
+            <a:prstDash val="solid"/>
+          </a:ln>
+        </p:spPr>
+      </p:sp>
+      <p:sp>
+        <p:nvSpPr>
+          <p:cNvPr id="7" name="Text 5"/>
+          <p:cNvSpPr txBox="1"/>
+          <p:nvPr/>
+        </p:nvSpPr>
+        <p:spPr>
+          <a:xfrm>
+            <a:off x="777240" y="2606040"/>
+            <a:ext cx="7680960" cy="548640"/>
+          </a:xfrm>
+          <a:prstGeom prst="rect">
+            <a:avLst/>
+          </a:prstGeom>
+          <a:noFill/>
+          <a:ln/>
+        </p:spPr>
+        <p:txBody>
+          <a:bodyPr wrap="square" lIns="0" tIns="0" rIns="0" bIns="0" rtlCol="0" anchor="ctr">
+            <a:normAutofit/>
+          </a:bodyPr>
+          <a:lstStyle/>
+          <a:p>
+            <a:pPr indent="0" marL="0">
+              <a:buNone/>
+            </a:pPr>
+            <a:r>
+              <a:rPr lang="en-US" sz="1800" dirty="0">
+                <a:solidFill>
+                  <a:srgbClr val="1F2937"/>
+                </a:solidFill>
+              </a:rPr>
+              <a:t>B)  Usar semente fixa</a:t>
+            </a:r>
+            <a:endParaRPr lang="en-US" sz="1800" dirty="0"/>
+          </a:p>
+        </p:txBody>
+      </p:sp>
+      <p:sp>
+        <p:nvSpPr>
+          <p:cNvPr id="8" name="Shape 6"/>
+          <p:cNvSpPr/>
+          <p:nvPr/>
+        </p:nvSpPr>
+        <p:spPr>
+          <a:xfrm>
+            <a:off x="548640" y="3246120"/>
+            <a:ext cx="8046720" cy="548640"/>
+          </a:xfrm>
+          <a:prstGeom prst="roundRect">
+            <a:avLst>
+              <a:gd name="adj" fmla="val 13333"/>
+            </a:avLst>
+          </a:prstGeom>
+          <a:solidFill>
+            <a:srgbClr val="EEF2FF"/>
+          </a:solidFill>
+          <a:ln w="12700">
+            <a:solidFill>
+              <a:srgbClr val="C7D2FE"/>
+            </a:solidFill>
+            <a:prstDash val="solid"/>
+          </a:ln>
+        </p:spPr>
+      </p:sp>
+      <p:sp>
+        <p:nvSpPr>
+          <p:cNvPr id="9" name="Text 7"/>
+          <p:cNvSpPr txBox="1"/>
+          <p:nvPr/>
+        </p:nvSpPr>
+        <p:spPr>
+          <a:xfrm>
+            <a:off x="777240" y="3246120"/>
+            <a:ext cx="7680960" cy="548640"/>
+          </a:xfrm>
+          <a:prstGeom prst="rect">
+            <a:avLst/>
+          </a:prstGeom>
+          <a:noFill/>
+          <a:ln/>
+        </p:spPr>
+        <p:txBody>
+          <a:bodyPr wrap="square" lIns="0" tIns="0" rIns="0" bIns="0" rtlCol="0" anchor="ctr">
+            <a:normAutofit/>
+          </a:bodyPr>
+          <a:lstStyle/>
+          <a:p>
+            <a:pPr indent="0" marL="0">
+              <a:buNone/>
+            </a:pPr>
+            <a:r>
+              <a:rPr lang="en-US" sz="1800" dirty="0">
+                <a:solidFill>
+                  <a:srgbClr val="1F2937"/>
+                </a:solidFill>
+              </a:rPr>
+              <a:t>C)  Padronizar só com o treino</a:t>
+            </a:r>
+            <a:endParaRPr lang="en-US" sz="1800" dirty="0"/>
+          </a:p>
+        </p:txBody>
+      </p:sp>
+      <p:sp>
+        <p:nvSpPr>
+          <p:cNvPr id="10" name="Shape 8"/>
+          <p:cNvSpPr/>
+          <p:nvPr/>
+        </p:nvSpPr>
+        <p:spPr>
+          <a:xfrm>
+            <a:off x="548640" y="3886200"/>
+            <a:ext cx="8046720" cy="548640"/>
+          </a:xfrm>
+          <a:prstGeom prst="roundRect">
+            <a:avLst>
+              <a:gd name="adj" fmla="val 13333"/>
+            </a:avLst>
+          </a:prstGeom>
+          <a:solidFill>
+            <a:srgbClr val="EEF2FF"/>
+          </a:solidFill>
+          <a:ln w="12700">
+            <a:solidFill>
+              <a:srgbClr val="C7D2FE"/>
+            </a:solidFill>
+            <a:prstDash val="solid"/>
+          </a:ln>
+        </p:spPr>
+      </p:sp>
+      <p:sp>
+        <p:nvSpPr>
+          <p:cNvPr id="11" name="Text 9"/>
+          <p:cNvSpPr txBox="1"/>
+          <p:nvPr/>
+        </p:nvSpPr>
+        <p:spPr>
+          <a:xfrm>
+            <a:off x="777240" y="3886200"/>
+            <a:ext cx="7680960" cy="548640"/>
+          </a:xfrm>
+          <a:prstGeom prst="rect">
+            <a:avLst/>
+          </a:prstGeom>
+          <a:noFill/>
+          <a:ln/>
+        </p:spPr>
+        <p:txBody>
+          <a:bodyPr wrap="square" lIns="0" tIns="0" rIns="0" bIns="0" rtlCol="0" anchor="ctr">
+            <a:normAutofit/>
+          </a:bodyPr>
+          <a:lstStyle/>
+          <a:p>
+            <a:pPr indent="0" marL="0">
+              <a:buNone/>
+            </a:pPr>
+            <a:r>
+              <a:rPr lang="en-US" sz="1800" dirty="0">
+                <a:solidFill>
+                  <a:srgbClr val="1F2937"/>
+                </a:solidFill>
+              </a:rPr>
+              <a:t>D)  Medir no conjunto de teste uma vez</a:t>
+            </a:r>
+            <a:endParaRPr lang="en-US" sz="1800" dirty="0"/>
+          </a:p>
+        </p:txBody>
+      </p:sp>
+      <p:sp>
+        <p:nvSpPr>
+          <p:cNvPr id="25" name="Slide Number Placeholder 0"/>
+          <p:cNvSpPr>
+            <a:spLocks noGrp="1"/>
+          </p:cNvSpPr>
+          <p:nvPr>
+            <p:ph type="sldNum" sz="quarter" idx="4294967295"/>
+          </p:nvPr>
+        </p:nvSpPr>
+        <p:spPr>
+          <a:xfrm>
+            <a:off x="8412480" y="4828032"/>
+            <a:ext cx="457200" cy="228600"/>
+          </a:xfrm>
+          <a:prstGeom prst="rect">
+            <a:avLst/>
+          </a:prstGeom>
+          <a:extLst>
+            <a:ext uri="{C572A759-6A51-4108-AA02-DFA0A04FC94B}">
+              <ma14:wrappingTextBoxFlag xmlns:ma14="http://schemas.microsoft.com/office/mac/drawingml/2011/main" val="0"/>
+            </a:ext>
+          </a:extLst>
+        </p:spPr>
+        <p:txBody>
+          <a:bodyPr/>
+          <a:lstStyle>
+            <a:lvl1pPr>
+              <a:defRPr sz="900">
+                <a:solidFill>
+                  <a:srgbClr val="6B7280"/>
+                </a:solidFill>
+              </a:defRPr>
+            </a:lvl1pPr>
+          </a:lstStyle>
+          <a:p>
+            <a:pPr algn="l"/>
+            <a:fld id="{F7021451-1387-4CA6-816F-3879F97B5CBC}" type="slidenum">
+              <a:rPr b="0" lang="en-US"/>
+              <a:t>16</a:t>
+            </a:fld>
+            <a:endParaRPr lang="en-US"/>
+          </a:p>
+        </p:txBody>
+      </p:sp>
+    </p:spTree>
+  </p:cSld>
+  <p:clrMapOvr>
+    <a:masterClrMapping/>
+  </p:clrMapOvr>
+</p:sld>
+</file>
+
+<file path=ppt/slides/slide17.xml><?xml version="1.0" encoding="utf-8"?>
+<p:sld xmlns:a="http://schemas.openxmlformats.org/drawingml/2006/main" xmlns:r="http://schemas.openxmlformats.org/officeDocument/2006/relationships" xmlns:p="http://schemas.openxmlformats.org/presentationml/2006/main">
+  <p:cSld name="Slide 17">
+    <p:spTree>
+      <p:nvGrpSpPr>
+        <p:cNvPr id="1" name=""/>
+        <p:cNvGrpSpPr/>
+        <p:nvPr/>
+      </p:nvGrpSpPr>
+      <p:grpSpPr>
+        <a:xfrm>
+          <a:off x="0" y="0"/>
+          <a:ext cx="0" cy="0"/>
+          <a:chOff x="0" y="0"/>
+          <a:chExt cx="0" cy="0"/>
+        </a:xfrm>
+      </p:grpSpPr>
+      <p:sp>
+        <p:nvSpPr>
+          <p:cNvPr id="2" name="Text 0"/>
+          <p:cNvSpPr txBox="1"/>
+          <p:nvPr/>
+        </p:nvSpPr>
+        <p:spPr>
+          <a:xfrm>
+            <a:off x="365760" y="109728"/>
+            <a:ext cx="8412480" cy="658368"/>
+          </a:xfrm>
+          <a:prstGeom prst="rect">
+            <a:avLst/>
+          </a:prstGeom>
+          <a:noFill/>
+          <a:ln/>
+        </p:spPr>
+        <p:txBody>
+          <a:bodyPr wrap="square" lIns="0" tIns="0" rIns="0" bIns="0" rtlCol="0" anchor="ctr">
+            <a:normAutofit/>
+          </a:bodyPr>
+          <a:lstStyle/>
+          <a:p>
+            <a:pPr indent="0" marL="0">
+              <a:buNone/>
+            </a:pPr>
+            <a:r>
+              <a:rPr lang="en-US" sz="2600" b="1" dirty="0">
+                <a:solidFill>
+                  <a:srgbClr val="FFFFFF"/>
+                </a:solidFill>
+                <a:latin typeface="Calibri" pitchFamily="34" charset="0"/>
+                <a:ea typeface="Calibri" pitchFamily="34" charset="-122"/>
+                <a:cs typeface="Calibri" pitchFamily="34" charset="-120"/>
+              </a:rPr>
+              <a:t>Atividade</a:t>
+            </a:r>
+            <a:endParaRPr lang="en-US" sz="2600" dirty="0"/>
+          </a:p>
+        </p:txBody>
+      </p:sp>
+      <p:sp>
+        <p:nvSpPr>
+          <p:cNvPr id="3" name="Shape 1"/>
+          <p:cNvSpPr/>
+          <p:nvPr/>
+        </p:nvSpPr>
+        <p:spPr>
+          <a:xfrm>
+            <a:off x="548640" y="1188720"/>
+            <a:ext cx="8046720" cy="3108960"/>
+          </a:xfrm>
+          <a:prstGeom prst="roundRect">
+            <a:avLst>
+              <a:gd name="adj" fmla="val 3529"/>
+            </a:avLst>
+          </a:prstGeom>
+          <a:solidFill>
+            <a:srgbClr val="FFFBEB"/>
+          </a:solidFill>
+          <a:ln w="25400">
+            <a:solidFill>
+              <a:srgbClr val="F59E0B"/>
+            </a:solidFill>
+            <a:prstDash val="solid"/>
+          </a:ln>
+        </p:spPr>
+      </p:sp>
+      <p:sp>
+        <p:nvSpPr>
+          <p:cNvPr id="4" name="Text 2"/>
+          <p:cNvSpPr txBox="1"/>
+          <p:nvPr/>
+        </p:nvSpPr>
+        <p:spPr>
+          <a:xfrm>
+            <a:off x="822960" y="1325880"/>
+            <a:ext cx="3657600" cy="365760"/>
+          </a:xfrm>
+          <a:prstGeom prst="rect">
+            <a:avLst/>
+          </a:prstGeom>
+          <a:noFill/>
+          <a:ln/>
+        </p:spPr>
+        <p:txBody>
+          <a:bodyPr wrap="square" lIns="0" tIns="0" rIns="0" bIns="0" rtlCol="0" anchor="ctr"/>
+          <a:lstStyle/>
+          <a:p>
+            <a:pPr indent="0" marL="0">
+              <a:buNone/>
+            </a:pPr>
+            <a:r>
+              <a:rPr lang="en-US" sz="1400" b="1" spc="300" kern="0" dirty="0">
+                <a:solidFill>
+                  <a:srgbClr val="B45309"/>
+                </a:solidFill>
+              </a:rPr>
+              <a:t>MÃO NA MASSA</a:t>
+            </a:r>
+            <a:endParaRPr lang="en-US" sz="1400" dirty="0"/>
+          </a:p>
+        </p:txBody>
+      </p:sp>
+      <p:sp>
+        <p:nvSpPr>
+          <p:cNvPr id="5" name="Text 3"/>
+          <p:cNvSpPr txBox="1"/>
+          <p:nvPr/>
+        </p:nvSpPr>
+        <p:spPr>
+          <a:xfrm>
+            <a:off x="822960" y="1783080"/>
+            <a:ext cx="7498080" cy="2377440"/>
+          </a:xfrm>
+          <a:prstGeom prst="rect">
+            <a:avLst/>
+          </a:prstGeom>
+          <a:noFill/>
+          <a:ln/>
+        </p:spPr>
+        <p:txBody>
+          <a:bodyPr wrap="square" lIns="0" tIns="0" rIns="0" bIns="0" rtlCol="0" anchor="t">
+            <a:normAutofit/>
+          </a:bodyPr>
+          <a:lstStyle/>
+          <a:p>
+            <a:pPr indent="0" marL="0">
+              <a:buNone/>
+            </a:pPr>
+            <a:r>
+              <a:rPr lang="en-US" sz="2100" dirty="0">
+                <a:solidFill>
+                  <a:srgbClr val="1F2937"/>
+                </a:solidFill>
+              </a:rPr>
+              <a:t>Calcule à mão uma passagem direta e uma reversa para a rede 2–2–1 do capítulo. Depois confira com o código e com o gradiente numérico.</a:t>
+            </a:r>
+            <a:endParaRPr lang="en-US" sz="2100" dirty="0"/>
+          </a:p>
+        </p:txBody>
+      </p:sp>
+      <p:sp>
+        <p:nvSpPr>
+          <p:cNvPr id="25" name="Slide Number Placeholder 0"/>
+          <p:cNvSpPr>
+            <a:spLocks noGrp="1"/>
+          </p:cNvSpPr>
+          <p:nvPr>
+            <p:ph type="sldNum" sz="quarter" idx="4294967295"/>
+          </p:nvPr>
+        </p:nvSpPr>
+        <p:spPr>
+          <a:xfrm>
+            <a:off x="8412480" y="4828032"/>
+            <a:ext cx="457200" cy="228600"/>
+          </a:xfrm>
+          <a:prstGeom prst="rect">
+            <a:avLst/>
+          </a:prstGeom>
+          <a:extLst>
+            <a:ext uri="{C572A759-6A51-4108-AA02-DFA0A04FC94B}">
+              <ma14:wrappingTextBoxFlag xmlns:ma14="http://schemas.microsoft.com/office/mac/drawingml/2011/main" val="0"/>
+            </a:ext>
+          </a:extLst>
+        </p:spPr>
+        <p:txBody>
+          <a:bodyPr/>
+          <a:lstStyle>
+            <a:lvl1pPr>
+              <a:defRPr sz="900">
+                <a:solidFill>
+                  <a:srgbClr val="6B7280"/>
+                </a:solidFill>
+              </a:defRPr>
+            </a:lvl1pPr>
+          </a:lstStyle>
+          <a:p>
+            <a:pPr algn="l"/>
+            <a:fld id="{F7021451-1387-4CA6-816F-3879F97B5CBC}" type="slidenum">
+              <a:rPr b="0" lang="en-US"/>
+              <a:t>17</a:t>
+            </a:fld>
+            <a:endParaRPr lang="en-US"/>
+          </a:p>
+        </p:txBody>
+      </p:sp>
+    </p:spTree>
+  </p:cSld>
+  <p:clrMapOvr>
+    <a:masterClrMapping/>
+  </p:clrMapOvr>
+</p:sld>
+</file>
+
+<file path=ppt/slides/slide18.xml><?xml version="1.0" encoding="utf-8"?>
+<p:sld xmlns:a="http://schemas.openxmlformats.org/drawingml/2006/main" xmlns:r="http://schemas.openxmlformats.org/officeDocument/2006/relationships" xmlns:p="http://schemas.openxmlformats.org/presentationml/2006/main">
+  <p:cSld name="Slide 18">
+    <p:spTree>
+      <p:nvGrpSpPr>
+        <p:cNvPr id="1" name=""/>
+        <p:cNvGrpSpPr/>
+        <p:nvPr/>
+      </p:nvGrpSpPr>
+      <p:grpSpPr>
+        <a:xfrm>
+          <a:off x="0" y="0"/>
+          <a:ext cx="0" cy="0"/>
+          <a:chOff x="0" y="0"/>
+          <a:chExt cx="0" cy="0"/>
+        </a:xfrm>
+      </p:grpSpPr>
+      <p:sp>
+        <p:nvSpPr>
+          <p:cNvPr id="2" name="Text 0"/>
+          <p:cNvSpPr txBox="1"/>
+          <p:nvPr/>
+        </p:nvSpPr>
+        <p:spPr>
+          <a:xfrm>
             <a:off x="640080" y="457200"/>
             <a:ext cx="7863840" cy="731520"/>
           </a:xfrm>
@@ -3063,6 +4968,130 @@
               <a:t>Separe treino, validação e teste</a:t>
             </a:r>
             <a:endParaRPr lang="en-US" sz="2200" dirty="0"/>
+          </a:p>
+        </p:txBody>
+      </p:sp>
+    </p:spTree>
+  </p:cSld>
+  <p:clrMapOvr>
+    <a:masterClrMapping/>
+  </p:clrMapOvr>
+</p:sld>
+</file>
+
+<file path=ppt/slides/slide19.xml><?xml version="1.0" encoding="utf-8"?>
+<p:sld xmlns:a="http://schemas.openxmlformats.org/drawingml/2006/main" xmlns:r="http://schemas.openxmlformats.org/officeDocument/2006/relationships" xmlns:p="http://schemas.openxmlformats.org/presentationml/2006/main">
+  <p:cSld name="Slide 19">
+    <p:spTree>
+      <p:nvGrpSpPr>
+        <p:cNvPr id="1" name=""/>
+        <p:cNvGrpSpPr/>
+        <p:nvPr/>
+      </p:nvGrpSpPr>
+      <p:grpSpPr>
+        <a:xfrm>
+          <a:off x="0" y="0"/>
+          <a:ext cx="0" cy="0"/>
+          <a:chOff x="0" y="0"/>
+          <a:chExt cx="0" cy="0"/>
+        </a:xfrm>
+      </p:grpSpPr>
+      <p:sp>
+        <p:nvSpPr>
+          <p:cNvPr id="2" name="Shape 0"/>
+          <p:cNvSpPr/>
+          <p:nvPr/>
+        </p:nvSpPr>
+        <p:spPr>
+          <a:xfrm>
+            <a:off x="640080" y="1188720"/>
+            <a:ext cx="109728" cy="2194560"/>
+          </a:xfrm>
+          <a:prstGeom prst="rect">
+            <a:avLst/>
+          </a:prstGeom>
+          <a:solidFill>
+            <a:srgbClr val="F59E0B"/>
+          </a:solidFill>
+          <a:ln w="12700">
+            <a:solidFill>
+              <a:srgbClr val="F59E0B"/>
+            </a:solidFill>
+            <a:prstDash val="solid"/>
+          </a:ln>
+        </p:spPr>
+      </p:sp>
+      <p:sp>
+        <p:nvSpPr>
+          <p:cNvPr id="3" name="Text 1"/>
+          <p:cNvSpPr txBox="1"/>
+          <p:nvPr/>
+        </p:nvSpPr>
+        <p:spPr>
+          <a:xfrm>
+            <a:off x="1005840" y="1097280"/>
+            <a:ext cx="7498080" cy="2377440"/>
+          </a:xfrm>
+          <a:prstGeom prst="rect">
+            <a:avLst/>
+          </a:prstGeom>
+          <a:noFill/>
+          <a:ln/>
+        </p:spPr>
+        <p:txBody>
+          <a:bodyPr wrap="square" lIns="0" tIns="0" rIns="0" bIns="0" rtlCol="0" anchor="ctr">
+            <a:normAutofit/>
+          </a:bodyPr>
+          <a:lstStyle/>
+          <a:p>
+            <a:pPr indent="0" marL="0">
+              <a:buNone/>
+            </a:pPr>
+            <a:r>
+              <a:rPr lang="en-US" sz="3400" b="1" dirty="0">
+                <a:solidFill>
+                  <a:srgbClr val="FFFFFF"/>
+                </a:solidFill>
+              </a:rPr>
+              <a:t>“Backpropagation: a regra da cadeia, bem organizada.”</a:t>
+            </a:r>
+            <a:endParaRPr lang="en-US" sz="3400" dirty="0"/>
+          </a:p>
+        </p:txBody>
+      </p:sp>
+      <p:sp>
+        <p:nvSpPr>
+          <p:cNvPr id="4" name="Text 2"/>
+          <p:cNvSpPr txBox="1"/>
+          <p:nvPr/>
+        </p:nvSpPr>
+        <p:spPr>
+          <a:xfrm>
+            <a:off x="1005840" y="3931920"/>
+            <a:ext cx="7315200" cy="365760"/>
+          </a:xfrm>
+          <a:prstGeom prst="rect">
+            <a:avLst/>
+          </a:prstGeom>
+          <a:noFill/>
+          <a:ln/>
+        </p:spPr>
+        <p:txBody>
+          <a:bodyPr wrap="square" lIns="0" tIns="0" rIns="0" bIns="0" rtlCol="0" anchor="ctr"/>
+          <a:lstStyle/>
+          <a:p>
+            <a:pPr indent="0" marL="0">
+              <a:buNone/>
+            </a:pPr>
+            <a:r>
+              <a:rPr lang="en-US" sz="1400" dirty="0">
+                <a:solidFill>
+                  <a:srgbClr val="A5B4FC"/>
+                </a:solidFill>
+              </a:rPr>
+              <a:t>Backpropagation e Redes Neurais · Capítulo 4</a:t>
+            </a:r>
+            <a:endParaRPr lang="en-US" sz="1400" dirty="0"/>
           </a:p>
         </p:txBody>
       </p:sp>
@@ -3126,7 +5155,7 @@
                 <a:ea typeface="Calibri" pitchFamily="34" charset="-122"/>
                 <a:cs typeface="Calibri" pitchFamily="34" charset="-120"/>
               </a:rPr>
-              <a:t>Situação inicial: culpa compartilhada</a:t>
+              <a:t>Roteiro da aula</a:t>
             </a:r>
             <a:endParaRPr lang="en-US" sz="2600" dirty="0"/>
           </a:p>
@@ -3140,8 +5169,8 @@
         </p:nvSpPr>
         <p:spPr>
           <a:xfrm>
-            <a:off x="548640" y="1188720"/>
-            <a:ext cx="8046720" cy="3383280"/>
+            <a:off x="731520" y="1188720"/>
+            <a:ext cx="7680960" cy="3291840"/>
           </a:xfrm>
           <a:prstGeom prst="rect">
             <a:avLst/>
@@ -3150,63 +5179,121 @@
           <a:ln/>
         </p:spPr>
         <p:txBody>
-          <a:bodyPr wrap="square" lIns="0" tIns="0" rIns="0" bIns="0" rtlCol="0" anchor="t">
-            <a:normAutofit/>
-          </a:bodyPr>
+          <a:bodyPr wrap="square" lIns="0" tIns="0" rIns="0" bIns="0" rtlCol="0" anchor="t"/>
           <a:lstStyle/>
           <a:p>
             <a:pPr marL="342900" indent="-342900">
               <a:spcAft>
-                <a:spcPts val="1400"/>
+                <a:spcPts val="1200"/>
               </a:spcAft>
               <a:buSzPct val="100000"/>
-              <a:buChar char="•"/>
-            </a:pPr>
-            <a:r>
-              <a:rPr lang="en-US" sz="2400" dirty="0">
+              <a:buFont typeface="+mj-lt"/>
+              <a:buAutoNum type="arabicPeriod" startAt="1"/>
+            </a:pPr>
+            <a:r>
+              <a:rPr lang="en-US" sz="2200" dirty="0">
                 <a:solidFill>
                   <a:srgbClr val="1F2937"/>
                 </a:solidFill>
               </a:rPr>
-              <a:t>Quem errou, na camada oculta?</a:t>
-            </a:r>
-            <a:endParaRPr lang="en-US" sz="2400" dirty="0"/>
+              <a:t>Situação inicial e objetivos</a:t>
+            </a:r>
+            <a:endParaRPr lang="en-US" sz="2200" dirty="0"/>
           </a:p>
           <a:p>
             <a:pPr marL="342900" indent="-342900">
               <a:spcAft>
-                <a:spcPts val="1400"/>
+                <a:spcPts val="1200"/>
               </a:spcAft>
               <a:buSzPct val="100000"/>
-              <a:buChar char="•"/>
-            </a:pPr>
-            <a:r>
-              <a:rPr lang="en-US" sz="2400" dirty="0">
+              <a:buFont typeface="+mj-lt"/>
+              <a:buAutoNum type="arabicPeriod" startAt="1"/>
+            </a:pPr>
+            <a:r>
+              <a:rPr lang="en-US" sz="2200" dirty="0">
                 <a:solidFill>
                   <a:srgbClr val="1F2937"/>
                 </a:solidFill>
               </a:rPr>
-              <a:t>A regra da cadeia distribui a responsabilidade</a:t>
-            </a:r>
-            <a:endParaRPr lang="en-US" sz="2400" dirty="0"/>
+              <a:t>Analogia do dia a dia</a:t>
+            </a:r>
+            <a:endParaRPr lang="en-US" sz="2200" dirty="0"/>
           </a:p>
           <a:p>
             <a:pPr marL="342900" indent="-342900">
               <a:spcAft>
-                <a:spcPts val="1400"/>
+                <a:spcPts val="1200"/>
               </a:spcAft>
               <a:buSzPct val="100000"/>
-              <a:buChar char="•"/>
-            </a:pPr>
-            <a:r>
-              <a:rPr lang="en-US" sz="2400" dirty="0">
+              <a:buFont typeface="+mj-lt"/>
+              <a:buAutoNum type="arabicPeriod" startAt="1"/>
+            </a:pPr>
+            <a:r>
+              <a:rPr lang="en-US" sz="2200" dirty="0">
                 <a:solidFill>
                   <a:srgbClr val="1F2937"/>
                 </a:solidFill>
               </a:rPr>
-              <a:t>O erro volta da saída para a entrada</a:t>
-            </a:r>
-            <a:endParaRPr lang="en-US" sz="2400" dirty="0"/>
+              <a:t>Conceitos, demonstrações e figuras</a:t>
+            </a:r>
+            <a:endParaRPr lang="en-US" sz="2200" dirty="0"/>
+          </a:p>
+          <a:p>
+            <a:pPr marL="342900" indent="-342900">
+              <a:spcAft>
+                <a:spcPts val="1200"/>
+              </a:spcAft>
+              <a:buSzPct val="100000"/>
+              <a:buFont typeface="+mj-lt"/>
+              <a:buAutoNum type="arabicPeriod" startAt="1"/>
+            </a:pPr>
+            <a:r>
+              <a:rPr lang="en-US" sz="2200" dirty="0">
+                <a:solidFill>
+                  <a:srgbClr val="1F2937"/>
+                </a:solidFill>
+              </a:rPr>
+              <a:t>Exemplos e resultados do livro</a:t>
+            </a:r>
+            <a:endParaRPr lang="en-US" sz="2200" dirty="0"/>
+          </a:p>
+          <a:p>
+            <a:pPr marL="342900" indent="-342900">
+              <a:spcAft>
+                <a:spcPts val="1200"/>
+              </a:spcAft>
+              <a:buSzPct val="100000"/>
+              <a:buFont typeface="+mj-lt"/>
+              <a:buAutoNum type="arabicPeriod" startAt="1"/>
+            </a:pPr>
+            <a:r>
+              <a:rPr lang="en-US" sz="2200" dirty="0">
+                <a:solidFill>
+                  <a:srgbClr val="1F2937"/>
+                </a:solidFill>
+              </a:rPr>
+              <a:t>Quiz relâmpago</a:t>
+            </a:r>
+            <a:endParaRPr lang="en-US" sz="2200" dirty="0"/>
+          </a:p>
+          <a:p>
+            <a:pPr marL="342900" indent="-342900">
+              <a:spcAft>
+                <a:spcPts val="1200"/>
+              </a:spcAft>
+              <a:buSzPct val="100000"/>
+              <a:buFont typeface="+mj-lt"/>
+              <a:buAutoNum type="arabicPeriod" startAt="1"/>
+            </a:pPr>
+            <a:r>
+              <a:rPr lang="en-US" sz="2200" dirty="0">
+                <a:solidFill>
+                  <a:srgbClr val="1F2937"/>
+                </a:solidFill>
+              </a:rPr>
+              <a:t>Atividade mão na massa e síntese</a:t>
+            </a:r>
+            <a:endParaRPr lang="en-US" sz="2200" dirty="0"/>
           </a:p>
         </p:txBody>
       </p:sp>
@@ -3315,46 +5402,22 @@
                 <a:ea typeface="Calibri" pitchFamily="34" charset="-122"/>
                 <a:cs typeface="Calibri" pitchFamily="34" charset="-120"/>
               </a:rPr>
-              <a:t>Grafo de computação</a:t>
+              <a:t>Situação inicial: culpa compartilhada</a:t>
             </a:r>
             <a:endParaRPr lang="en-US" sz="2600" dirty="0"/>
           </a:p>
         </p:txBody>
       </p:sp>
-      <p:pic>
-        <p:nvPicPr>
-          <p:cNvPr id="3" name="Image 0" descr="A rede 2–2–1 como grafo: cada nó calcula e guarda seu valor.">    </p:cNvPr>
-          <p:cNvPicPr>
-            <a:picLocks noChangeAspect="1"/>
-          </p:cNvPicPr>
-          <p:nvPr/>
-        </p:nvPicPr>
-        <p:blipFill>
-          <a:blip r:embed="rId1"/>
-          <a:stretch>
-            <a:fillRect/>
-          </a:stretch>
-        </p:blipFill>
-        <p:spPr>
-          <a:xfrm>
-            <a:off x="1290179" y="1005840"/>
-            <a:ext cx="6563642" cy="3154680"/>
-          </a:xfrm>
-          <a:prstGeom prst="rect">
-            <a:avLst/>
-          </a:prstGeom>
-        </p:spPr>
-      </p:pic>
-      <p:sp>
-        <p:nvSpPr>
-          <p:cNvPr id="4" name="Text 1"/>
+      <p:sp>
+        <p:nvSpPr>
+          <p:cNvPr id="3" name="Text 1"/>
           <p:cNvSpPr txBox="1"/>
           <p:nvPr/>
         </p:nvSpPr>
         <p:spPr>
           <a:xfrm>
-            <a:off x="457200" y="4251960"/>
-            <a:ext cx="8229600" cy="457200"/>
+            <a:off x="548640" y="1188720"/>
+            <a:ext cx="8046720" cy="3383280"/>
           </a:xfrm>
           <a:prstGeom prst="rect">
             <a:avLst/>
@@ -3368,18 +5431,58 @@
           </a:bodyPr>
           <a:lstStyle/>
           <a:p>
-            <a:pPr algn="ctr" indent="0" marL="0">
-              <a:buNone/>
-            </a:pPr>
-            <a:r>
-              <a:rPr lang="en-US" sz="1400" i="1" dirty="0">
-                <a:solidFill>
-                  <a:srgbClr val="4B5563"/>
-                </a:solidFill>
-              </a:rPr>
-              <a:t>A rede 2–2–1 como grafo: cada nó calcula e guarda seu valor.</a:t>
-            </a:r>
-            <a:endParaRPr lang="en-US" sz="1400" dirty="0"/>
+            <a:pPr marL="342900" indent="-342900">
+              <a:spcAft>
+                <a:spcPts val="1400"/>
+              </a:spcAft>
+              <a:buSzPct val="100000"/>
+              <a:buChar char="•"/>
+            </a:pPr>
+            <a:r>
+              <a:rPr lang="en-US" sz="2400" dirty="0">
+                <a:solidFill>
+                  <a:srgbClr val="1F2937"/>
+                </a:solidFill>
+              </a:rPr>
+              <a:t>Quem errou, na camada oculta?</a:t>
+            </a:r>
+            <a:endParaRPr lang="en-US" sz="2400" dirty="0"/>
+          </a:p>
+          <a:p>
+            <a:pPr marL="342900" indent="-342900">
+              <a:spcAft>
+                <a:spcPts val="1400"/>
+              </a:spcAft>
+              <a:buSzPct val="100000"/>
+              <a:buChar char="•"/>
+            </a:pPr>
+            <a:r>
+              <a:rPr lang="en-US" sz="2400" dirty="0">
+                <a:solidFill>
+                  <a:srgbClr val="1F2937"/>
+                </a:solidFill>
+              </a:rPr>
+              <a:t>A regra da cadeia distribui a responsabilidade</a:t>
+            </a:r>
+            <a:endParaRPr lang="en-US" sz="2400" dirty="0"/>
+          </a:p>
+          <a:p>
+            <a:pPr marL="342900" indent="-342900">
+              <a:spcAft>
+                <a:spcPts val="1400"/>
+              </a:spcAft>
+              <a:buSzPct val="100000"/>
+              <a:buChar char="•"/>
+            </a:pPr>
+            <a:r>
+              <a:rPr lang="en-US" sz="2400" dirty="0">
+                <a:solidFill>
+                  <a:srgbClr val="1F2937"/>
+                </a:solidFill>
+              </a:rPr>
+              <a:t>O erro volta da saída para a entrada</a:t>
+            </a:r>
+            <a:endParaRPr lang="en-US" sz="2400" dirty="0"/>
           </a:p>
         </p:txBody>
       </p:sp>
@@ -3488,49 +5591,46 @@
                 <a:ea typeface="Calibri" pitchFamily="34" charset="-122"/>
                 <a:cs typeface="Calibri" pitchFamily="34" charset="-120"/>
               </a:rPr>
-              <a:t>Passagem direta em lote</a:t>
+              <a:t>Grafo de computação</a:t>
             </a:r>
             <a:endParaRPr lang="en-US" sz="2600" dirty="0"/>
           </a:p>
         </p:txBody>
       </p:sp>
-      <p:sp>
-        <p:nvSpPr>
-          <p:cNvPr id="3" name="Shape 1"/>
-          <p:cNvSpPr/>
-          <p:nvPr/>
-        </p:nvSpPr>
-        <p:spPr>
-          <a:xfrm>
-            <a:off x="457200" y="1097280"/>
-            <a:ext cx="8229600" cy="868680"/>
-          </a:xfrm>
-          <a:prstGeom prst="roundRect">
-            <a:avLst>
-              <a:gd name="adj" fmla="val 8421"/>
-            </a:avLst>
-          </a:prstGeom>
-          <a:solidFill>
-            <a:srgbClr val="E0E7FF"/>
-          </a:solidFill>
-          <a:ln w="9525">
-            <a:solidFill>
-              <a:srgbClr val="C7D2FE"/>
-            </a:solidFill>
-            <a:prstDash val="solid"/>
-          </a:ln>
-        </p:spPr>
-      </p:sp>
-      <p:sp>
-        <p:nvSpPr>
-          <p:cNvPr id="4" name="Text 2"/>
+      <p:pic>
+        <p:nvPicPr>
+          <p:cNvPr id="3" name="Image 0" descr="A rede 2–2–1 como grafo: cada nó calcula e guarda seu valor.">    </p:cNvPr>
+          <p:cNvPicPr>
+            <a:picLocks noChangeAspect="1"/>
+          </p:cNvPicPr>
+          <p:nvPr/>
+        </p:nvPicPr>
+        <p:blipFill>
+          <a:blip r:embed="rId1"/>
+          <a:stretch>
+            <a:fillRect/>
+          </a:stretch>
+        </p:blipFill>
+        <p:spPr>
+          <a:xfrm>
+            <a:off x="1290179" y="1005840"/>
+            <a:ext cx="6563642" cy="3154680"/>
+          </a:xfrm>
+          <a:prstGeom prst="rect">
+            <a:avLst/>
+          </a:prstGeom>
+        </p:spPr>
+      </p:pic>
+      <p:sp>
+        <p:nvSpPr>
+          <p:cNvPr id="4" name="Text 1"/>
           <p:cNvSpPr txBox="1"/>
           <p:nvPr/>
         </p:nvSpPr>
         <p:spPr>
           <a:xfrm>
-            <a:off x="594360" y="1097280"/>
-            <a:ext cx="2743200" cy="868680"/>
+            <a:off x="457200" y="4251960"/>
+            <a:ext cx="8229600" cy="457200"/>
           </a:xfrm>
           <a:prstGeom prst="rect">
             <a:avLst/>
@@ -3539,276 +5639,23 @@
           <a:ln/>
         </p:spPr>
         <p:txBody>
-          <a:bodyPr wrap="square" lIns="0" tIns="0" rIns="0" bIns="0" rtlCol="0" anchor="ctr">
+          <a:bodyPr wrap="square" lIns="0" tIns="0" rIns="0" bIns="0" rtlCol="0" anchor="t">
             <a:normAutofit/>
           </a:bodyPr>
           <a:lstStyle/>
           <a:p>
-            <a:pPr indent="0" marL="0">
+            <a:pPr algn="ctr" indent="0" marL="0">
               <a:buNone/>
             </a:pPr>
             <a:r>
-              <a:rPr lang="en-US" sz="1400" b="1" dirty="0">
-                <a:solidFill>
-                  <a:srgbClr val="312E81"/>
-                </a:solidFill>
-              </a:rPr>
-              <a:t>1. Pré-ativação</a:t>
+              <a:rPr lang="en-US" sz="1400" i="1" dirty="0">
+                <a:solidFill>
+                  <a:srgbClr val="4B5563"/>
+                </a:solidFill>
+              </a:rPr>
+              <a:t>A rede 2–2–1 como grafo: cada nó calcula e guarda seu valor.</a:t>
             </a:r>
             <a:endParaRPr lang="en-US" sz="1400" dirty="0"/>
-          </a:p>
-        </p:txBody>
-      </p:sp>
-      <p:sp>
-        <p:nvSpPr>
-          <p:cNvPr id="5" name="Text 3"/>
-          <p:cNvSpPr txBox="1"/>
-          <p:nvPr/>
-        </p:nvSpPr>
-        <p:spPr>
-          <a:xfrm>
-            <a:off x="3383280" y="1097280"/>
-            <a:ext cx="5212080" cy="868680"/>
-          </a:xfrm>
-          <a:prstGeom prst="rect">
-            <a:avLst/>
-          </a:prstGeom>
-          <a:noFill/>
-          <a:ln/>
-        </p:spPr>
-        <p:txBody>
-          <a:bodyPr wrap="square" lIns="0" tIns="0" rIns="0" bIns="0" rtlCol="0" anchor="ctr">
-            <a:normAutofit/>
-          </a:bodyPr>
-          <a:lstStyle/>
-          <a:p>
-            <a:pPr indent="0" marL="0">
-              <a:buNone/>
-            </a:pPr>
-            <a:r>
-              <a:rPr lang="en-US" sz="1700" dirty="0">
-                <a:solidFill>
-                  <a:srgbClr val="1F2937"/>
-                </a:solidFill>
-                <a:latin typeface="Cambria Math" pitchFamily="34" charset="0"/>
-                <a:ea typeface="Cambria Math" pitchFamily="34" charset="-122"/>
-                <a:cs typeface="Cambria Math" pitchFamily="34" charset="-120"/>
-              </a:rPr>
-              <a:t>Z⁽ˡ⁾ = A⁽ˡ⁻¹⁾ W⁽ˡ⁾ᵀ + 1 b⁽ˡ⁾ᵀ</a:t>
-            </a:r>
-            <a:endParaRPr lang="en-US" sz="1700" dirty="0"/>
-          </a:p>
-        </p:txBody>
-      </p:sp>
-      <p:sp>
-        <p:nvSpPr>
-          <p:cNvPr id="6" name="Shape 4"/>
-          <p:cNvSpPr/>
-          <p:nvPr/>
-        </p:nvSpPr>
-        <p:spPr>
-          <a:xfrm>
-            <a:off x="457200" y="2039112"/>
-            <a:ext cx="8229600" cy="868680"/>
-          </a:xfrm>
-          <a:prstGeom prst="roundRect">
-            <a:avLst>
-              <a:gd name="adj" fmla="val 8421"/>
-            </a:avLst>
-          </a:prstGeom>
-          <a:solidFill>
-            <a:srgbClr val="EEF2FF"/>
-          </a:solidFill>
-          <a:ln w="9525">
-            <a:solidFill>
-              <a:srgbClr val="C7D2FE"/>
-            </a:solidFill>
-            <a:prstDash val="solid"/>
-          </a:ln>
-        </p:spPr>
-      </p:sp>
-      <p:sp>
-        <p:nvSpPr>
-          <p:cNvPr id="7" name="Text 5"/>
-          <p:cNvSpPr txBox="1"/>
-          <p:nvPr/>
-        </p:nvSpPr>
-        <p:spPr>
-          <a:xfrm>
-            <a:off x="594360" y="2039112"/>
-            <a:ext cx="2743200" cy="868680"/>
-          </a:xfrm>
-          <a:prstGeom prst="rect">
-            <a:avLst/>
-          </a:prstGeom>
-          <a:noFill/>
-          <a:ln/>
-        </p:spPr>
-        <p:txBody>
-          <a:bodyPr wrap="square" lIns="0" tIns="0" rIns="0" bIns="0" rtlCol="0" anchor="ctr">
-            <a:normAutofit/>
-          </a:bodyPr>
-          <a:lstStyle/>
-          <a:p>
-            <a:pPr indent="0" marL="0">
-              <a:buNone/>
-            </a:pPr>
-            <a:r>
-              <a:rPr lang="en-US" sz="1400" b="1" dirty="0">
-                <a:solidFill>
-                  <a:srgbClr val="312E81"/>
-                </a:solidFill>
-              </a:rPr>
-              <a:t>2. Ativação</a:t>
-            </a:r>
-            <a:endParaRPr lang="en-US" sz="1400" dirty="0"/>
-          </a:p>
-        </p:txBody>
-      </p:sp>
-      <p:sp>
-        <p:nvSpPr>
-          <p:cNvPr id="8" name="Text 6"/>
-          <p:cNvSpPr txBox="1"/>
-          <p:nvPr/>
-        </p:nvSpPr>
-        <p:spPr>
-          <a:xfrm>
-            <a:off x="3383280" y="2039112"/>
-            <a:ext cx="5212080" cy="868680"/>
-          </a:xfrm>
-          <a:prstGeom prst="rect">
-            <a:avLst/>
-          </a:prstGeom>
-          <a:noFill/>
-          <a:ln/>
-        </p:spPr>
-        <p:txBody>
-          <a:bodyPr wrap="square" lIns="0" tIns="0" rIns="0" bIns="0" rtlCol="0" anchor="ctr">
-            <a:normAutofit/>
-          </a:bodyPr>
-          <a:lstStyle/>
-          <a:p>
-            <a:pPr indent="0" marL="0">
-              <a:buNone/>
-            </a:pPr>
-            <a:r>
-              <a:rPr lang="en-US" sz="1700" dirty="0">
-                <a:solidFill>
-                  <a:srgbClr val="1F2937"/>
-                </a:solidFill>
-                <a:latin typeface="Cambria Math" pitchFamily="34" charset="0"/>
-                <a:ea typeface="Cambria Math" pitchFamily="34" charset="-122"/>
-                <a:cs typeface="Cambria Math" pitchFamily="34" charset="-120"/>
-              </a:rPr>
-              <a:t>A⁽ˡ⁾ = f(Z⁽ˡ⁾)</a:t>
-            </a:r>
-            <a:endParaRPr lang="en-US" sz="1700" dirty="0"/>
-          </a:p>
-        </p:txBody>
-      </p:sp>
-      <p:sp>
-        <p:nvSpPr>
-          <p:cNvPr id="9" name="Shape 7"/>
-          <p:cNvSpPr/>
-          <p:nvPr/>
-        </p:nvSpPr>
-        <p:spPr>
-          <a:xfrm>
-            <a:off x="457200" y="2980944"/>
-            <a:ext cx="8229600" cy="868680"/>
-          </a:xfrm>
-          <a:prstGeom prst="roundRect">
-            <a:avLst>
-              <a:gd name="adj" fmla="val 8421"/>
-            </a:avLst>
-          </a:prstGeom>
-          <a:solidFill>
-            <a:srgbClr val="E0E7FF"/>
-          </a:solidFill>
-          <a:ln w="9525">
-            <a:solidFill>
-              <a:srgbClr val="C7D2FE"/>
-            </a:solidFill>
-            <a:prstDash val="solid"/>
-          </a:ln>
-        </p:spPr>
-      </p:sp>
-      <p:sp>
-        <p:nvSpPr>
-          <p:cNvPr id="10" name="Text 8"/>
-          <p:cNvSpPr txBox="1"/>
-          <p:nvPr/>
-        </p:nvSpPr>
-        <p:spPr>
-          <a:xfrm>
-            <a:off x="594360" y="2980944"/>
-            <a:ext cx="2743200" cy="868680"/>
-          </a:xfrm>
-          <a:prstGeom prst="rect">
-            <a:avLst/>
-          </a:prstGeom>
-          <a:noFill/>
-          <a:ln/>
-        </p:spPr>
-        <p:txBody>
-          <a:bodyPr wrap="square" lIns="0" tIns="0" rIns="0" bIns="0" rtlCol="0" anchor="ctr">
-            <a:normAutofit/>
-          </a:bodyPr>
-          <a:lstStyle/>
-          <a:p>
-            <a:pPr indent="0" marL="0">
-              <a:buNone/>
-            </a:pPr>
-            <a:r>
-              <a:rPr lang="en-US" sz="1400" b="1" dirty="0">
-                <a:solidFill>
-                  <a:srgbClr val="312E81"/>
-                </a:solidFill>
-              </a:rPr>
-              <a:t>3. Erro</a:t>
-            </a:r>
-            <a:endParaRPr lang="en-US" sz="1400" dirty="0"/>
-          </a:p>
-        </p:txBody>
-      </p:sp>
-      <p:sp>
-        <p:nvSpPr>
-          <p:cNvPr id="11" name="Text 9"/>
-          <p:cNvSpPr txBox="1"/>
-          <p:nvPr/>
-        </p:nvSpPr>
-        <p:spPr>
-          <a:xfrm>
-            <a:off x="3383280" y="2980944"/>
-            <a:ext cx="5212080" cy="868680"/>
-          </a:xfrm>
-          <a:prstGeom prst="rect">
-            <a:avLst/>
-          </a:prstGeom>
-          <a:noFill/>
-          <a:ln/>
-        </p:spPr>
-        <p:txBody>
-          <a:bodyPr wrap="square" lIns="0" tIns="0" rIns="0" bIns="0" rtlCol="0" anchor="ctr">
-            <a:normAutofit/>
-          </a:bodyPr>
-          <a:lstStyle/>
-          <a:p>
-            <a:pPr indent="0" marL="0">
-              <a:buNone/>
-            </a:pPr>
-            <a:r>
-              <a:rPr lang="en-US" sz="1700" dirty="0">
-                <a:solidFill>
-                  <a:srgbClr val="1F2937"/>
-                </a:solidFill>
-                <a:latin typeface="Cambria Math" pitchFamily="34" charset="0"/>
-                <a:ea typeface="Cambria Math" pitchFamily="34" charset="-122"/>
-                <a:cs typeface="Cambria Math" pitchFamily="34" charset="-120"/>
-              </a:rPr>
-              <a:t>E = ½ Σ (A⁽ᴸ⁾ − T)²</a:t>
-            </a:r>
-            <a:endParaRPr lang="en-US" sz="1700" dirty="0"/>
           </a:p>
         </p:txBody>
       </p:sp>
@@ -3917,7 +5764,7 @@
                 <a:ea typeface="Calibri" pitchFamily="34" charset="-122"/>
                 <a:cs typeface="Calibri" pitchFamily="34" charset="-120"/>
               </a:rPr>
-              <a:t>As quatro equações do backpropagation</a:t>
+              <a:t>Analogia: a linha de montagem</a:t>
             </a:r>
             <a:endParaRPr lang="en-US" sz="2600" dirty="0"/>
           </a:p>
@@ -3931,20 +5778,20 @@
         </p:nvSpPr>
         <p:spPr>
           <a:xfrm>
-            <a:off x="457200" y="1097280"/>
-            <a:ext cx="8229600" cy="868680"/>
+            <a:off x="548640" y="1188720"/>
+            <a:ext cx="8046720" cy="3108960"/>
           </a:xfrm>
           <a:prstGeom prst="roundRect">
             <a:avLst>
-              <a:gd name="adj" fmla="val 8421"/>
+              <a:gd name="adj" fmla="val 3529"/>
             </a:avLst>
           </a:prstGeom>
           <a:solidFill>
-            <a:srgbClr val="E0E7FF"/>
+            <a:srgbClr val="ECFEFF"/>
           </a:solidFill>
-          <a:ln w="9525">
+          <a:ln w="25400">
             <a:solidFill>
-              <a:srgbClr val="C7D2FE"/>
+              <a:srgbClr val="06B6D4"/>
             </a:solidFill>
             <a:prstDash val="solid"/>
           </a:ln>
@@ -3958,8 +5805,8 @@
         </p:nvSpPr>
         <p:spPr>
           <a:xfrm>
-            <a:off x="594360" y="1097280"/>
-            <a:ext cx="2743200" cy="868680"/>
+            <a:off x="822960" y="1325880"/>
+            <a:ext cx="3657600" cy="365760"/>
           </a:xfrm>
           <a:prstGeom prst="rect">
             <a:avLst/>
@@ -3968,7 +5815,43 @@
           <a:ln/>
         </p:spPr>
         <p:txBody>
-          <a:bodyPr wrap="square" lIns="0" tIns="0" rIns="0" bIns="0" rtlCol="0" anchor="ctr">
+          <a:bodyPr wrap="square" lIns="0" tIns="0" rIns="0" bIns="0" rtlCol="0" anchor="ctr"/>
+          <a:lstStyle/>
+          <a:p>
+            <a:pPr indent="0" marL="0">
+              <a:buNone/>
+            </a:pPr>
+            <a:r>
+              <a:rPr lang="en-US" sz="1400" b="1" spc="300" kern="0" dirty="0">
+                <a:solidFill>
+                  <a:srgbClr val="0E7490"/>
+                </a:solidFill>
+              </a:rPr>
+              <a:t>NO SEU DIA A DIA</a:t>
+            </a:r>
+            <a:endParaRPr lang="en-US" sz="1400" dirty="0"/>
+          </a:p>
+        </p:txBody>
+      </p:sp>
+      <p:sp>
+        <p:nvSpPr>
+          <p:cNvPr id="5" name="Text 3"/>
+          <p:cNvSpPr txBox="1"/>
+          <p:nvPr/>
+        </p:nvSpPr>
+        <p:spPr>
+          <a:xfrm>
+            <a:off x="822960" y="1783080"/>
+            <a:ext cx="7498080" cy="2377440"/>
+          </a:xfrm>
+          <a:prstGeom prst="rect">
+            <a:avLst/>
+          </a:prstGeom>
+          <a:noFill/>
+          <a:ln/>
+        </p:spPr>
+        <p:txBody>
+          <a:bodyPr wrap="square" lIns="0" tIns="0" rIns="0" bIns="0" rtlCol="0" anchor="t">
             <a:normAutofit/>
           </a:bodyPr>
           <a:lstStyle/>
@@ -3977,373 +5860,14 @@
               <a:buNone/>
             </a:pPr>
             <a:r>
-              <a:rPr lang="en-US" sz="1400" b="1" dirty="0">
-                <a:solidFill>
-                  <a:srgbClr val="312E81"/>
-                </a:solidFill>
-              </a:rPr>
-              <a:t>1. BP1 — saída</a:t>
-            </a:r>
-            <a:endParaRPr lang="en-US" sz="1400" dirty="0"/>
-          </a:p>
-        </p:txBody>
-      </p:sp>
-      <p:sp>
-        <p:nvSpPr>
-          <p:cNvPr id="5" name="Text 3"/>
-          <p:cNvSpPr txBox="1"/>
-          <p:nvPr/>
-        </p:nvSpPr>
-        <p:spPr>
-          <a:xfrm>
-            <a:off x="3383280" y="1097280"/>
-            <a:ext cx="5212080" cy="868680"/>
-          </a:xfrm>
-          <a:prstGeom prst="rect">
-            <a:avLst/>
-          </a:prstGeom>
-          <a:noFill/>
-          <a:ln/>
-        </p:spPr>
-        <p:txBody>
-          <a:bodyPr wrap="square" lIns="0" tIns="0" rIns="0" bIns="0" rtlCol="0" anchor="ctr">
-            <a:normAutofit/>
-          </a:bodyPr>
-          <a:lstStyle/>
-          <a:p>
-            <a:pPr indent="0" marL="0">
-              <a:buNone/>
-            </a:pPr>
-            <a:r>
-              <a:rPr lang="en-US" sz="1700" dirty="0">
+              <a:rPr lang="en-US" sz="2100" dirty="0">
                 <a:solidFill>
                   <a:srgbClr val="1F2937"/>
                 </a:solidFill>
-                <a:latin typeface="Cambria Math" pitchFamily="34" charset="0"/>
-                <a:ea typeface="Cambria Math" pitchFamily="34" charset="-122"/>
-                <a:cs typeface="Cambria Math" pitchFamily="34" charset="-120"/>
-              </a:rPr>
-              <a:t>δ⁽ᴸ⁾ = (A⁽ᴸ⁾ − T) ⊙ f′(Z⁽ᴸ⁾)</a:t>
-            </a:r>
-            <a:endParaRPr lang="en-US" sz="1700" dirty="0"/>
-          </a:p>
-        </p:txBody>
-      </p:sp>
-      <p:sp>
-        <p:nvSpPr>
-          <p:cNvPr id="6" name="Shape 4"/>
-          <p:cNvSpPr/>
-          <p:nvPr/>
-        </p:nvSpPr>
-        <p:spPr>
-          <a:xfrm>
-            <a:off x="457200" y="2039112"/>
-            <a:ext cx="8229600" cy="868680"/>
-          </a:xfrm>
-          <a:prstGeom prst="roundRect">
-            <a:avLst>
-              <a:gd name="adj" fmla="val 8421"/>
-            </a:avLst>
-          </a:prstGeom>
-          <a:solidFill>
-            <a:srgbClr val="EEF2FF"/>
-          </a:solidFill>
-          <a:ln w="9525">
-            <a:solidFill>
-              <a:srgbClr val="C7D2FE"/>
-            </a:solidFill>
-            <a:prstDash val="solid"/>
-          </a:ln>
-        </p:spPr>
-      </p:sp>
-      <p:sp>
-        <p:nvSpPr>
-          <p:cNvPr id="7" name="Text 5"/>
-          <p:cNvSpPr txBox="1"/>
-          <p:nvPr/>
-        </p:nvSpPr>
-        <p:spPr>
-          <a:xfrm>
-            <a:off x="594360" y="2039112"/>
-            <a:ext cx="2743200" cy="868680"/>
-          </a:xfrm>
-          <a:prstGeom prst="rect">
-            <a:avLst/>
-          </a:prstGeom>
-          <a:noFill/>
-          <a:ln/>
-        </p:spPr>
-        <p:txBody>
-          <a:bodyPr wrap="square" lIns="0" tIns="0" rIns="0" bIns="0" rtlCol="0" anchor="ctr">
-            <a:normAutofit/>
-          </a:bodyPr>
-          <a:lstStyle/>
-          <a:p>
-            <a:pPr indent="0" marL="0">
-              <a:buNone/>
-            </a:pPr>
-            <a:r>
-              <a:rPr lang="en-US" sz="1400" b="1" dirty="0">
-                <a:solidFill>
-                  <a:srgbClr val="312E81"/>
-                </a:solidFill>
-              </a:rPr>
-              <a:t>2. BP2 — retropropagação</a:t>
-            </a:r>
-            <a:endParaRPr lang="en-US" sz="1400" dirty="0"/>
-          </a:p>
-        </p:txBody>
-      </p:sp>
-      <p:sp>
-        <p:nvSpPr>
-          <p:cNvPr id="8" name="Text 6"/>
-          <p:cNvSpPr txBox="1"/>
-          <p:nvPr/>
-        </p:nvSpPr>
-        <p:spPr>
-          <a:xfrm>
-            <a:off x="3383280" y="2039112"/>
-            <a:ext cx="5212080" cy="868680"/>
-          </a:xfrm>
-          <a:prstGeom prst="rect">
-            <a:avLst/>
-          </a:prstGeom>
-          <a:noFill/>
-          <a:ln/>
-        </p:spPr>
-        <p:txBody>
-          <a:bodyPr wrap="square" lIns="0" tIns="0" rIns="0" bIns="0" rtlCol="0" anchor="ctr">
-            <a:normAutofit/>
-          </a:bodyPr>
-          <a:lstStyle/>
-          <a:p>
-            <a:pPr indent="0" marL="0">
-              <a:buNone/>
-            </a:pPr>
-            <a:r>
-              <a:rPr lang="en-US" sz="1700" dirty="0">
-                <a:solidFill>
-                  <a:srgbClr val="1F2937"/>
-                </a:solidFill>
-                <a:latin typeface="Cambria Math" pitchFamily="34" charset="0"/>
-                <a:ea typeface="Cambria Math" pitchFamily="34" charset="-122"/>
-                <a:cs typeface="Cambria Math" pitchFamily="34" charset="-120"/>
-              </a:rPr>
-              <a:t>δ⁽ˡ⁾ = (δ⁽ˡ⁺¹⁾ W⁽ˡ⁺¹⁾) ⊙ f′(Z⁽ˡ⁾)</a:t>
-            </a:r>
-            <a:endParaRPr lang="en-US" sz="1700" dirty="0"/>
-          </a:p>
-        </p:txBody>
-      </p:sp>
-      <p:sp>
-        <p:nvSpPr>
-          <p:cNvPr id="9" name="Shape 7"/>
-          <p:cNvSpPr/>
-          <p:nvPr/>
-        </p:nvSpPr>
-        <p:spPr>
-          <a:xfrm>
-            <a:off x="457200" y="2980944"/>
-            <a:ext cx="8229600" cy="868680"/>
-          </a:xfrm>
-          <a:prstGeom prst="roundRect">
-            <a:avLst>
-              <a:gd name="adj" fmla="val 8421"/>
-            </a:avLst>
-          </a:prstGeom>
-          <a:solidFill>
-            <a:srgbClr val="E0E7FF"/>
-          </a:solidFill>
-          <a:ln w="9525">
-            <a:solidFill>
-              <a:srgbClr val="C7D2FE"/>
-            </a:solidFill>
-            <a:prstDash val="solid"/>
-          </a:ln>
-        </p:spPr>
-      </p:sp>
-      <p:sp>
-        <p:nvSpPr>
-          <p:cNvPr id="10" name="Text 8"/>
-          <p:cNvSpPr txBox="1"/>
-          <p:nvPr/>
-        </p:nvSpPr>
-        <p:spPr>
-          <a:xfrm>
-            <a:off x="594360" y="2980944"/>
-            <a:ext cx="2743200" cy="868680"/>
-          </a:xfrm>
-          <a:prstGeom prst="rect">
-            <a:avLst/>
-          </a:prstGeom>
-          <a:noFill/>
-          <a:ln/>
-        </p:spPr>
-        <p:txBody>
-          <a:bodyPr wrap="square" lIns="0" tIns="0" rIns="0" bIns="0" rtlCol="0" anchor="ctr">
-            <a:normAutofit/>
-          </a:bodyPr>
-          <a:lstStyle/>
-          <a:p>
-            <a:pPr indent="0" marL="0">
-              <a:buNone/>
-            </a:pPr>
-            <a:r>
-              <a:rPr lang="en-US" sz="1400" b="1" dirty="0">
-                <a:solidFill>
-                  <a:srgbClr val="312E81"/>
-                </a:solidFill>
-              </a:rPr>
-              <a:t>3. BP3 — pesos</a:t>
-            </a:r>
-            <a:endParaRPr lang="en-US" sz="1400" dirty="0"/>
-          </a:p>
-        </p:txBody>
-      </p:sp>
-      <p:sp>
-        <p:nvSpPr>
-          <p:cNvPr id="11" name="Text 9"/>
-          <p:cNvSpPr txBox="1"/>
-          <p:nvPr/>
-        </p:nvSpPr>
-        <p:spPr>
-          <a:xfrm>
-            <a:off x="3383280" y="2980944"/>
-            <a:ext cx="5212080" cy="868680"/>
-          </a:xfrm>
-          <a:prstGeom prst="rect">
-            <a:avLst/>
-          </a:prstGeom>
-          <a:noFill/>
-          <a:ln/>
-        </p:spPr>
-        <p:txBody>
-          <a:bodyPr wrap="square" lIns="0" tIns="0" rIns="0" bIns="0" rtlCol="0" anchor="ctr">
-            <a:normAutofit/>
-          </a:bodyPr>
-          <a:lstStyle/>
-          <a:p>
-            <a:pPr indent="0" marL="0">
-              <a:buNone/>
-            </a:pPr>
-            <a:r>
-              <a:rPr lang="en-US" sz="1700" dirty="0">
-                <a:solidFill>
-                  <a:srgbClr val="1F2937"/>
-                </a:solidFill>
-                <a:latin typeface="Cambria Math" pitchFamily="34" charset="0"/>
-                <a:ea typeface="Cambria Math" pitchFamily="34" charset="-122"/>
-                <a:cs typeface="Cambria Math" pitchFamily="34" charset="-120"/>
-              </a:rPr>
-              <a:t>∂E/∂W⁽ˡ⁾ = δ⁽ˡ⁾ᵀ A⁽ˡ⁻¹⁾</a:t>
-            </a:r>
-            <a:endParaRPr lang="en-US" sz="1700" dirty="0"/>
-          </a:p>
-        </p:txBody>
-      </p:sp>
-      <p:sp>
-        <p:nvSpPr>
-          <p:cNvPr id="12" name="Shape 10"/>
-          <p:cNvSpPr/>
-          <p:nvPr/>
-        </p:nvSpPr>
-        <p:spPr>
-          <a:xfrm>
-            <a:off x="457200" y="3922776"/>
-            <a:ext cx="8229600" cy="868680"/>
-          </a:xfrm>
-          <a:prstGeom prst="roundRect">
-            <a:avLst>
-              <a:gd name="adj" fmla="val 8421"/>
-            </a:avLst>
-          </a:prstGeom>
-          <a:solidFill>
-            <a:srgbClr val="EEF2FF"/>
-          </a:solidFill>
-          <a:ln w="9525">
-            <a:solidFill>
-              <a:srgbClr val="C7D2FE"/>
-            </a:solidFill>
-            <a:prstDash val="solid"/>
-          </a:ln>
-        </p:spPr>
-      </p:sp>
-      <p:sp>
-        <p:nvSpPr>
-          <p:cNvPr id="13" name="Text 11"/>
-          <p:cNvSpPr txBox="1"/>
-          <p:nvPr/>
-        </p:nvSpPr>
-        <p:spPr>
-          <a:xfrm>
-            <a:off x="594360" y="3922776"/>
-            <a:ext cx="2743200" cy="868680"/>
-          </a:xfrm>
-          <a:prstGeom prst="rect">
-            <a:avLst/>
-          </a:prstGeom>
-          <a:noFill/>
-          <a:ln/>
-        </p:spPr>
-        <p:txBody>
-          <a:bodyPr wrap="square" lIns="0" tIns="0" rIns="0" bIns="0" rtlCol="0" anchor="ctr">
-            <a:normAutofit/>
-          </a:bodyPr>
-          <a:lstStyle/>
-          <a:p>
-            <a:pPr indent="0" marL="0">
-              <a:buNone/>
-            </a:pPr>
-            <a:r>
-              <a:rPr lang="en-US" sz="1400" b="1" dirty="0">
-                <a:solidFill>
-                  <a:srgbClr val="312E81"/>
-                </a:solidFill>
-              </a:rPr>
-              <a:t>4. BP4 — vieses</a:t>
-            </a:r>
-            <a:endParaRPr lang="en-US" sz="1400" dirty="0"/>
-          </a:p>
-        </p:txBody>
-      </p:sp>
-      <p:sp>
-        <p:nvSpPr>
-          <p:cNvPr id="14" name="Text 12"/>
-          <p:cNvSpPr txBox="1"/>
-          <p:nvPr/>
-        </p:nvSpPr>
-        <p:spPr>
-          <a:xfrm>
-            <a:off x="3383280" y="3922776"/>
-            <a:ext cx="5212080" cy="868680"/>
-          </a:xfrm>
-          <a:prstGeom prst="rect">
-            <a:avLst/>
-          </a:prstGeom>
-          <a:noFill/>
-          <a:ln/>
-        </p:spPr>
-        <p:txBody>
-          <a:bodyPr wrap="square" lIns="0" tIns="0" rIns="0" bIns="0" rtlCol="0" anchor="ctr">
-            <a:normAutofit/>
-          </a:bodyPr>
-          <a:lstStyle/>
-          <a:p>
-            <a:pPr indent="0" marL="0">
-              <a:buNone/>
-            </a:pPr>
-            <a:r>
-              <a:rPr lang="en-US" sz="1700" dirty="0">
-                <a:solidFill>
-                  <a:srgbClr val="1F2937"/>
-                </a:solidFill>
-                <a:latin typeface="Cambria Math" pitchFamily="34" charset="0"/>
-                <a:ea typeface="Cambria Math" pitchFamily="34" charset="-122"/>
-                <a:cs typeface="Cambria Math" pitchFamily="34" charset="-120"/>
-              </a:rPr>
-              <a:t>∂E/∂b⁽ˡ⁾ = Σ das linhas de δ⁽ˡ⁾</a:t>
-            </a:r>
-            <a:endParaRPr lang="en-US" sz="1700" dirty="0"/>
+              </a:rPr>
+              <a:t>Numa linha de montagem, o produto final saiu com defeito. Quem errou? Voltamos estação por estação perguntando: quanto você contribuiu para o defeito? É o backpropagation: o erro da saída é repartido, camada por camada, até chegar a cada peso.</a:t>
+            </a:r>
+            <a:endParaRPr lang="en-US" sz="2100" dirty="0"/>
           </a:p>
         </p:txBody>
       </p:sp>
@@ -4452,46 +5976,49 @@
                 <a:ea typeface="Calibri" pitchFamily="34" charset="-122"/>
                 <a:cs typeface="Calibri" pitchFamily="34" charset="-120"/>
               </a:rPr>
-              <a:t>Verificando o gradiente</a:t>
+              <a:t>Passagem direta em lote</a:t>
             </a:r>
             <a:endParaRPr lang="en-US" sz="2600" dirty="0"/>
           </a:p>
         </p:txBody>
       </p:sp>
-      <p:pic>
-        <p:nvPicPr>
-          <p:cNvPr id="3" name="Image 0" descr="Diferenças finitas: o erro relativo fica em torno de 1e-10.">    </p:cNvPr>
-          <p:cNvPicPr>
-            <a:picLocks noChangeAspect="1"/>
-          </p:cNvPicPr>
-          <p:nvPr/>
-        </p:nvPicPr>
-        <p:blipFill>
-          <a:blip r:embed="rId1"/>
-          <a:stretch>
-            <a:fillRect/>
-          </a:stretch>
-        </p:blipFill>
-        <p:spPr>
-          <a:xfrm>
-            <a:off x="2293620" y="1005840"/>
-            <a:ext cx="4556760" cy="3154680"/>
-          </a:xfrm>
-          <a:prstGeom prst="rect">
-            <a:avLst/>
-          </a:prstGeom>
-        </p:spPr>
-      </p:pic>
-      <p:sp>
-        <p:nvSpPr>
-          <p:cNvPr id="4" name="Text 1"/>
+      <p:sp>
+        <p:nvSpPr>
+          <p:cNvPr id="3" name="Shape 1"/>
+          <p:cNvSpPr/>
+          <p:nvPr/>
+        </p:nvSpPr>
+        <p:spPr>
+          <a:xfrm>
+            <a:off x="457200" y="1097280"/>
+            <a:ext cx="8229600" cy="868680"/>
+          </a:xfrm>
+          <a:prstGeom prst="roundRect">
+            <a:avLst>
+              <a:gd name="adj" fmla="val 8421"/>
+            </a:avLst>
+          </a:prstGeom>
+          <a:solidFill>
+            <a:srgbClr val="E0E7FF"/>
+          </a:solidFill>
+          <a:ln w="9525">
+            <a:solidFill>
+              <a:srgbClr val="C7D2FE"/>
+            </a:solidFill>
+            <a:prstDash val="solid"/>
+          </a:ln>
+        </p:spPr>
+      </p:sp>
+      <p:sp>
+        <p:nvSpPr>
+          <p:cNvPr id="4" name="Text 2"/>
           <p:cNvSpPr txBox="1"/>
           <p:nvPr/>
         </p:nvSpPr>
         <p:spPr>
           <a:xfrm>
-            <a:off x="457200" y="4251960"/>
-            <a:ext cx="8229600" cy="457200"/>
+            <a:off x="594360" y="1097280"/>
+            <a:ext cx="2743200" cy="868680"/>
           </a:xfrm>
           <a:prstGeom prst="rect">
             <a:avLst/>
@@ -4500,23 +6027,276 @@
           <a:ln/>
         </p:spPr>
         <p:txBody>
-          <a:bodyPr wrap="square" lIns="0" tIns="0" rIns="0" bIns="0" rtlCol="0" anchor="t">
+          <a:bodyPr wrap="square" lIns="0" tIns="0" rIns="0" bIns="0" rtlCol="0" anchor="ctr">
             <a:normAutofit/>
           </a:bodyPr>
           <a:lstStyle/>
           <a:p>
-            <a:pPr algn="ctr" indent="0" marL="0">
+            <a:pPr indent="0" marL="0">
               <a:buNone/>
             </a:pPr>
             <a:r>
-              <a:rPr lang="en-US" sz="1400" i="1" dirty="0">
-                <a:solidFill>
-                  <a:srgbClr val="4B5563"/>
-                </a:solidFill>
-              </a:rPr>
-              <a:t>Diferenças finitas: o erro relativo fica em torno de 1e-10.</a:t>
+              <a:rPr lang="en-US" sz="1400" b="1" dirty="0">
+                <a:solidFill>
+                  <a:srgbClr val="312E81"/>
+                </a:solidFill>
+              </a:rPr>
+              <a:t>1. Pré-ativação</a:t>
             </a:r>
             <a:endParaRPr lang="en-US" sz="1400" dirty="0"/>
+          </a:p>
+        </p:txBody>
+      </p:sp>
+      <p:sp>
+        <p:nvSpPr>
+          <p:cNvPr id="5" name="Text 3"/>
+          <p:cNvSpPr txBox="1"/>
+          <p:nvPr/>
+        </p:nvSpPr>
+        <p:spPr>
+          <a:xfrm>
+            <a:off x="3383280" y="1097280"/>
+            <a:ext cx="5212080" cy="868680"/>
+          </a:xfrm>
+          <a:prstGeom prst="rect">
+            <a:avLst/>
+          </a:prstGeom>
+          <a:noFill/>
+          <a:ln/>
+        </p:spPr>
+        <p:txBody>
+          <a:bodyPr wrap="square" lIns="0" tIns="0" rIns="0" bIns="0" rtlCol="0" anchor="ctr">
+            <a:normAutofit/>
+          </a:bodyPr>
+          <a:lstStyle/>
+          <a:p>
+            <a:pPr indent="0" marL="0">
+              <a:buNone/>
+            </a:pPr>
+            <a:r>
+              <a:rPr lang="en-US" sz="1700" dirty="0">
+                <a:solidFill>
+                  <a:srgbClr val="1F2937"/>
+                </a:solidFill>
+                <a:latin typeface="Cambria Math" pitchFamily="34" charset="0"/>
+                <a:ea typeface="Cambria Math" pitchFamily="34" charset="-122"/>
+                <a:cs typeface="Cambria Math" pitchFamily="34" charset="-120"/>
+              </a:rPr>
+              <a:t>Z⁽ˡ⁾ = A⁽ˡ⁻¹⁾ W⁽ˡ⁾ᵀ + 1 b⁽ˡ⁾ᵀ</a:t>
+            </a:r>
+            <a:endParaRPr lang="en-US" sz="1700" dirty="0"/>
+          </a:p>
+        </p:txBody>
+      </p:sp>
+      <p:sp>
+        <p:nvSpPr>
+          <p:cNvPr id="6" name="Shape 4"/>
+          <p:cNvSpPr/>
+          <p:nvPr/>
+        </p:nvSpPr>
+        <p:spPr>
+          <a:xfrm>
+            <a:off x="457200" y="2039112"/>
+            <a:ext cx="8229600" cy="868680"/>
+          </a:xfrm>
+          <a:prstGeom prst="roundRect">
+            <a:avLst>
+              <a:gd name="adj" fmla="val 8421"/>
+            </a:avLst>
+          </a:prstGeom>
+          <a:solidFill>
+            <a:srgbClr val="EEF2FF"/>
+          </a:solidFill>
+          <a:ln w="9525">
+            <a:solidFill>
+              <a:srgbClr val="C7D2FE"/>
+            </a:solidFill>
+            <a:prstDash val="solid"/>
+          </a:ln>
+        </p:spPr>
+      </p:sp>
+      <p:sp>
+        <p:nvSpPr>
+          <p:cNvPr id="7" name="Text 5"/>
+          <p:cNvSpPr txBox="1"/>
+          <p:nvPr/>
+        </p:nvSpPr>
+        <p:spPr>
+          <a:xfrm>
+            <a:off x="594360" y="2039112"/>
+            <a:ext cx="2743200" cy="868680"/>
+          </a:xfrm>
+          <a:prstGeom prst="rect">
+            <a:avLst/>
+          </a:prstGeom>
+          <a:noFill/>
+          <a:ln/>
+        </p:spPr>
+        <p:txBody>
+          <a:bodyPr wrap="square" lIns="0" tIns="0" rIns="0" bIns="0" rtlCol="0" anchor="ctr">
+            <a:normAutofit/>
+          </a:bodyPr>
+          <a:lstStyle/>
+          <a:p>
+            <a:pPr indent="0" marL="0">
+              <a:buNone/>
+            </a:pPr>
+            <a:r>
+              <a:rPr lang="en-US" sz="1400" b="1" dirty="0">
+                <a:solidFill>
+                  <a:srgbClr val="312E81"/>
+                </a:solidFill>
+              </a:rPr>
+              <a:t>2. Ativação</a:t>
+            </a:r>
+            <a:endParaRPr lang="en-US" sz="1400" dirty="0"/>
+          </a:p>
+        </p:txBody>
+      </p:sp>
+      <p:sp>
+        <p:nvSpPr>
+          <p:cNvPr id="8" name="Text 6"/>
+          <p:cNvSpPr txBox="1"/>
+          <p:nvPr/>
+        </p:nvSpPr>
+        <p:spPr>
+          <a:xfrm>
+            <a:off x="3383280" y="2039112"/>
+            <a:ext cx="5212080" cy="868680"/>
+          </a:xfrm>
+          <a:prstGeom prst="rect">
+            <a:avLst/>
+          </a:prstGeom>
+          <a:noFill/>
+          <a:ln/>
+        </p:spPr>
+        <p:txBody>
+          <a:bodyPr wrap="square" lIns="0" tIns="0" rIns="0" bIns="0" rtlCol="0" anchor="ctr">
+            <a:normAutofit/>
+          </a:bodyPr>
+          <a:lstStyle/>
+          <a:p>
+            <a:pPr indent="0" marL="0">
+              <a:buNone/>
+            </a:pPr>
+            <a:r>
+              <a:rPr lang="en-US" sz="1700" dirty="0">
+                <a:solidFill>
+                  <a:srgbClr val="1F2937"/>
+                </a:solidFill>
+                <a:latin typeface="Cambria Math" pitchFamily="34" charset="0"/>
+                <a:ea typeface="Cambria Math" pitchFamily="34" charset="-122"/>
+                <a:cs typeface="Cambria Math" pitchFamily="34" charset="-120"/>
+              </a:rPr>
+              <a:t>A⁽ˡ⁾ = f(Z⁽ˡ⁾)</a:t>
+            </a:r>
+            <a:endParaRPr lang="en-US" sz="1700" dirty="0"/>
+          </a:p>
+        </p:txBody>
+      </p:sp>
+      <p:sp>
+        <p:nvSpPr>
+          <p:cNvPr id="9" name="Shape 7"/>
+          <p:cNvSpPr/>
+          <p:nvPr/>
+        </p:nvSpPr>
+        <p:spPr>
+          <a:xfrm>
+            <a:off x="457200" y="2980944"/>
+            <a:ext cx="8229600" cy="868680"/>
+          </a:xfrm>
+          <a:prstGeom prst="roundRect">
+            <a:avLst>
+              <a:gd name="adj" fmla="val 8421"/>
+            </a:avLst>
+          </a:prstGeom>
+          <a:solidFill>
+            <a:srgbClr val="E0E7FF"/>
+          </a:solidFill>
+          <a:ln w="9525">
+            <a:solidFill>
+              <a:srgbClr val="C7D2FE"/>
+            </a:solidFill>
+            <a:prstDash val="solid"/>
+          </a:ln>
+        </p:spPr>
+      </p:sp>
+      <p:sp>
+        <p:nvSpPr>
+          <p:cNvPr id="10" name="Text 8"/>
+          <p:cNvSpPr txBox="1"/>
+          <p:nvPr/>
+        </p:nvSpPr>
+        <p:spPr>
+          <a:xfrm>
+            <a:off x="594360" y="2980944"/>
+            <a:ext cx="2743200" cy="868680"/>
+          </a:xfrm>
+          <a:prstGeom prst="rect">
+            <a:avLst/>
+          </a:prstGeom>
+          <a:noFill/>
+          <a:ln/>
+        </p:spPr>
+        <p:txBody>
+          <a:bodyPr wrap="square" lIns="0" tIns="0" rIns="0" bIns="0" rtlCol="0" anchor="ctr">
+            <a:normAutofit/>
+          </a:bodyPr>
+          <a:lstStyle/>
+          <a:p>
+            <a:pPr indent="0" marL="0">
+              <a:buNone/>
+            </a:pPr>
+            <a:r>
+              <a:rPr lang="en-US" sz="1400" b="1" dirty="0">
+                <a:solidFill>
+                  <a:srgbClr val="312E81"/>
+                </a:solidFill>
+              </a:rPr>
+              <a:t>3. Erro</a:t>
+            </a:r>
+            <a:endParaRPr lang="en-US" sz="1400" dirty="0"/>
+          </a:p>
+        </p:txBody>
+      </p:sp>
+      <p:sp>
+        <p:nvSpPr>
+          <p:cNvPr id="11" name="Text 9"/>
+          <p:cNvSpPr txBox="1"/>
+          <p:nvPr/>
+        </p:nvSpPr>
+        <p:spPr>
+          <a:xfrm>
+            <a:off x="3383280" y="2980944"/>
+            <a:ext cx="5212080" cy="868680"/>
+          </a:xfrm>
+          <a:prstGeom prst="rect">
+            <a:avLst/>
+          </a:prstGeom>
+          <a:noFill/>
+          <a:ln/>
+        </p:spPr>
+        <p:txBody>
+          <a:bodyPr wrap="square" lIns="0" tIns="0" rIns="0" bIns="0" rtlCol="0" anchor="ctr">
+            <a:normAutofit/>
+          </a:bodyPr>
+          <a:lstStyle/>
+          <a:p>
+            <a:pPr indent="0" marL="0">
+              <a:buNone/>
+            </a:pPr>
+            <a:r>
+              <a:rPr lang="en-US" sz="1700" dirty="0">
+                <a:solidFill>
+                  <a:srgbClr val="1F2937"/>
+                </a:solidFill>
+                <a:latin typeface="Cambria Math" pitchFamily="34" charset="0"/>
+                <a:ea typeface="Cambria Math" pitchFamily="34" charset="-122"/>
+                <a:cs typeface="Cambria Math" pitchFamily="34" charset="-120"/>
+              </a:rPr>
+              <a:t>E = ½ Σ (A⁽ᴸ⁾ − T)²</a:t>
+            </a:r>
+            <a:endParaRPr lang="en-US" sz="1700" dirty="0"/>
           </a:p>
         </p:txBody>
       </p:sp>
@@ -4625,46 +6405,49 @@
                 <a:ea typeface="Calibri" pitchFamily="34" charset="-122"/>
                 <a:cs typeface="Calibri" pitchFamily="34" charset="-120"/>
               </a:rPr>
-              <a:t>XOR com backpropagation</a:t>
+              <a:t>As quatro equações do backpropagation</a:t>
             </a:r>
             <a:endParaRPr lang="en-US" sz="2600" dirty="0"/>
           </a:p>
         </p:txBody>
       </p:sp>
-      <p:pic>
-        <p:nvPicPr>
-          <p:cNvPr id="3" name="Image 0" descr="Uma camada oculta resolve o XOR; nem toda inicialização converge.">    </p:cNvPr>
-          <p:cNvPicPr>
-            <a:picLocks noChangeAspect="1"/>
-          </p:cNvPicPr>
-          <p:nvPr/>
-        </p:nvPicPr>
-        <p:blipFill>
-          <a:blip r:embed="rId1"/>
-          <a:stretch>
-            <a:fillRect/>
-          </a:stretch>
-        </p:blipFill>
-        <p:spPr>
-          <a:xfrm>
-            <a:off x="457200" y="1005840"/>
-            <a:ext cx="8229600" cy="3097819"/>
-          </a:xfrm>
-          <a:prstGeom prst="rect">
-            <a:avLst/>
-          </a:prstGeom>
-        </p:spPr>
-      </p:pic>
-      <p:sp>
-        <p:nvSpPr>
-          <p:cNvPr id="4" name="Text 1"/>
+      <p:sp>
+        <p:nvSpPr>
+          <p:cNvPr id="3" name="Shape 1"/>
+          <p:cNvSpPr/>
+          <p:nvPr/>
+        </p:nvSpPr>
+        <p:spPr>
+          <a:xfrm>
+            <a:off x="457200" y="1097280"/>
+            <a:ext cx="8229600" cy="868680"/>
+          </a:xfrm>
+          <a:prstGeom prst="roundRect">
+            <a:avLst>
+              <a:gd name="adj" fmla="val 8421"/>
+            </a:avLst>
+          </a:prstGeom>
+          <a:solidFill>
+            <a:srgbClr val="E0E7FF"/>
+          </a:solidFill>
+          <a:ln w="9525">
+            <a:solidFill>
+              <a:srgbClr val="C7D2FE"/>
+            </a:solidFill>
+            <a:prstDash val="solid"/>
+          </a:ln>
+        </p:spPr>
+      </p:sp>
+      <p:sp>
+        <p:nvSpPr>
+          <p:cNvPr id="4" name="Text 2"/>
           <p:cNvSpPr txBox="1"/>
           <p:nvPr/>
         </p:nvSpPr>
         <p:spPr>
           <a:xfrm>
-            <a:off x="457200" y="4195099"/>
-            <a:ext cx="8229600" cy="457200"/>
+            <a:off x="594360" y="1097280"/>
+            <a:ext cx="2743200" cy="868680"/>
           </a:xfrm>
           <a:prstGeom prst="rect">
             <a:avLst/>
@@ -4673,23 +6456,382 @@
           <a:ln/>
         </p:spPr>
         <p:txBody>
-          <a:bodyPr wrap="square" lIns="0" tIns="0" rIns="0" bIns="0" rtlCol="0" anchor="t">
+          <a:bodyPr wrap="square" lIns="0" tIns="0" rIns="0" bIns="0" rtlCol="0" anchor="ctr">
             <a:normAutofit/>
           </a:bodyPr>
           <a:lstStyle/>
           <a:p>
-            <a:pPr algn="ctr" indent="0" marL="0">
+            <a:pPr indent="0" marL="0">
               <a:buNone/>
             </a:pPr>
             <a:r>
-              <a:rPr lang="en-US" sz="1400" i="1" dirty="0">
-                <a:solidFill>
-                  <a:srgbClr val="4B5563"/>
-                </a:solidFill>
-              </a:rPr>
-              <a:t>Uma camada oculta resolve o XOR; nem toda inicialização converge.</a:t>
+              <a:rPr lang="en-US" sz="1400" b="1" dirty="0">
+                <a:solidFill>
+                  <a:srgbClr val="312E81"/>
+                </a:solidFill>
+              </a:rPr>
+              <a:t>1. BP1 — saída</a:t>
             </a:r>
             <a:endParaRPr lang="en-US" sz="1400" dirty="0"/>
+          </a:p>
+        </p:txBody>
+      </p:sp>
+      <p:sp>
+        <p:nvSpPr>
+          <p:cNvPr id="5" name="Text 3"/>
+          <p:cNvSpPr txBox="1"/>
+          <p:nvPr/>
+        </p:nvSpPr>
+        <p:spPr>
+          <a:xfrm>
+            <a:off x="3383280" y="1097280"/>
+            <a:ext cx="5212080" cy="868680"/>
+          </a:xfrm>
+          <a:prstGeom prst="rect">
+            <a:avLst/>
+          </a:prstGeom>
+          <a:noFill/>
+          <a:ln/>
+        </p:spPr>
+        <p:txBody>
+          <a:bodyPr wrap="square" lIns="0" tIns="0" rIns="0" bIns="0" rtlCol="0" anchor="ctr">
+            <a:normAutofit/>
+          </a:bodyPr>
+          <a:lstStyle/>
+          <a:p>
+            <a:pPr indent="0" marL="0">
+              <a:buNone/>
+            </a:pPr>
+            <a:r>
+              <a:rPr lang="en-US" sz="1700" dirty="0">
+                <a:solidFill>
+                  <a:srgbClr val="1F2937"/>
+                </a:solidFill>
+                <a:latin typeface="Cambria Math" pitchFamily="34" charset="0"/>
+                <a:ea typeface="Cambria Math" pitchFamily="34" charset="-122"/>
+                <a:cs typeface="Cambria Math" pitchFamily="34" charset="-120"/>
+              </a:rPr>
+              <a:t>δ⁽ᴸ⁾ = (A⁽ᴸ⁾ − T) ⊙ f′(Z⁽ᴸ⁾)</a:t>
+            </a:r>
+            <a:endParaRPr lang="en-US" sz="1700" dirty="0"/>
+          </a:p>
+        </p:txBody>
+      </p:sp>
+      <p:sp>
+        <p:nvSpPr>
+          <p:cNvPr id="6" name="Shape 4"/>
+          <p:cNvSpPr/>
+          <p:nvPr/>
+        </p:nvSpPr>
+        <p:spPr>
+          <a:xfrm>
+            <a:off x="457200" y="2039112"/>
+            <a:ext cx="8229600" cy="868680"/>
+          </a:xfrm>
+          <a:prstGeom prst="roundRect">
+            <a:avLst>
+              <a:gd name="adj" fmla="val 8421"/>
+            </a:avLst>
+          </a:prstGeom>
+          <a:solidFill>
+            <a:srgbClr val="EEF2FF"/>
+          </a:solidFill>
+          <a:ln w="9525">
+            <a:solidFill>
+              <a:srgbClr val="C7D2FE"/>
+            </a:solidFill>
+            <a:prstDash val="solid"/>
+          </a:ln>
+        </p:spPr>
+      </p:sp>
+      <p:sp>
+        <p:nvSpPr>
+          <p:cNvPr id="7" name="Text 5"/>
+          <p:cNvSpPr txBox="1"/>
+          <p:nvPr/>
+        </p:nvSpPr>
+        <p:spPr>
+          <a:xfrm>
+            <a:off x="594360" y="2039112"/>
+            <a:ext cx="2743200" cy="868680"/>
+          </a:xfrm>
+          <a:prstGeom prst="rect">
+            <a:avLst/>
+          </a:prstGeom>
+          <a:noFill/>
+          <a:ln/>
+        </p:spPr>
+        <p:txBody>
+          <a:bodyPr wrap="square" lIns="0" tIns="0" rIns="0" bIns="0" rtlCol="0" anchor="ctr">
+            <a:normAutofit/>
+          </a:bodyPr>
+          <a:lstStyle/>
+          <a:p>
+            <a:pPr indent="0" marL="0">
+              <a:buNone/>
+            </a:pPr>
+            <a:r>
+              <a:rPr lang="en-US" sz="1400" b="1" dirty="0">
+                <a:solidFill>
+                  <a:srgbClr val="312E81"/>
+                </a:solidFill>
+              </a:rPr>
+              <a:t>2. BP2 — retropropagação</a:t>
+            </a:r>
+            <a:endParaRPr lang="en-US" sz="1400" dirty="0"/>
+          </a:p>
+        </p:txBody>
+      </p:sp>
+      <p:sp>
+        <p:nvSpPr>
+          <p:cNvPr id="8" name="Text 6"/>
+          <p:cNvSpPr txBox="1"/>
+          <p:nvPr/>
+        </p:nvSpPr>
+        <p:spPr>
+          <a:xfrm>
+            <a:off x="3383280" y="2039112"/>
+            <a:ext cx="5212080" cy="868680"/>
+          </a:xfrm>
+          <a:prstGeom prst="rect">
+            <a:avLst/>
+          </a:prstGeom>
+          <a:noFill/>
+          <a:ln/>
+        </p:spPr>
+        <p:txBody>
+          <a:bodyPr wrap="square" lIns="0" tIns="0" rIns="0" bIns="0" rtlCol="0" anchor="ctr">
+            <a:normAutofit/>
+          </a:bodyPr>
+          <a:lstStyle/>
+          <a:p>
+            <a:pPr indent="0" marL="0">
+              <a:buNone/>
+            </a:pPr>
+            <a:r>
+              <a:rPr lang="en-US" sz="1700" dirty="0">
+                <a:solidFill>
+                  <a:srgbClr val="1F2937"/>
+                </a:solidFill>
+                <a:latin typeface="Cambria Math" pitchFamily="34" charset="0"/>
+                <a:ea typeface="Cambria Math" pitchFamily="34" charset="-122"/>
+                <a:cs typeface="Cambria Math" pitchFamily="34" charset="-120"/>
+              </a:rPr>
+              <a:t>δ⁽ˡ⁾ = (δ⁽ˡ⁺¹⁾ W⁽ˡ⁺¹⁾) ⊙ f′(Z⁽ˡ⁾)</a:t>
+            </a:r>
+            <a:endParaRPr lang="en-US" sz="1700" dirty="0"/>
+          </a:p>
+        </p:txBody>
+      </p:sp>
+      <p:sp>
+        <p:nvSpPr>
+          <p:cNvPr id="9" name="Shape 7"/>
+          <p:cNvSpPr/>
+          <p:nvPr/>
+        </p:nvSpPr>
+        <p:spPr>
+          <a:xfrm>
+            <a:off x="457200" y="2980944"/>
+            <a:ext cx="8229600" cy="868680"/>
+          </a:xfrm>
+          <a:prstGeom prst="roundRect">
+            <a:avLst>
+              <a:gd name="adj" fmla="val 8421"/>
+            </a:avLst>
+          </a:prstGeom>
+          <a:solidFill>
+            <a:srgbClr val="E0E7FF"/>
+          </a:solidFill>
+          <a:ln w="9525">
+            <a:solidFill>
+              <a:srgbClr val="C7D2FE"/>
+            </a:solidFill>
+            <a:prstDash val="solid"/>
+          </a:ln>
+        </p:spPr>
+      </p:sp>
+      <p:sp>
+        <p:nvSpPr>
+          <p:cNvPr id="10" name="Text 8"/>
+          <p:cNvSpPr txBox="1"/>
+          <p:nvPr/>
+        </p:nvSpPr>
+        <p:spPr>
+          <a:xfrm>
+            <a:off x="594360" y="2980944"/>
+            <a:ext cx="2743200" cy="868680"/>
+          </a:xfrm>
+          <a:prstGeom prst="rect">
+            <a:avLst/>
+          </a:prstGeom>
+          <a:noFill/>
+          <a:ln/>
+        </p:spPr>
+        <p:txBody>
+          <a:bodyPr wrap="square" lIns="0" tIns="0" rIns="0" bIns="0" rtlCol="0" anchor="ctr">
+            <a:normAutofit/>
+          </a:bodyPr>
+          <a:lstStyle/>
+          <a:p>
+            <a:pPr indent="0" marL="0">
+              <a:buNone/>
+            </a:pPr>
+            <a:r>
+              <a:rPr lang="en-US" sz="1400" b="1" dirty="0">
+                <a:solidFill>
+                  <a:srgbClr val="312E81"/>
+                </a:solidFill>
+              </a:rPr>
+              <a:t>3. BP3 — pesos</a:t>
+            </a:r>
+            <a:endParaRPr lang="en-US" sz="1400" dirty="0"/>
+          </a:p>
+        </p:txBody>
+      </p:sp>
+      <p:sp>
+        <p:nvSpPr>
+          <p:cNvPr id="11" name="Text 9"/>
+          <p:cNvSpPr txBox="1"/>
+          <p:nvPr/>
+        </p:nvSpPr>
+        <p:spPr>
+          <a:xfrm>
+            <a:off x="3383280" y="2980944"/>
+            <a:ext cx="5212080" cy="868680"/>
+          </a:xfrm>
+          <a:prstGeom prst="rect">
+            <a:avLst/>
+          </a:prstGeom>
+          <a:noFill/>
+          <a:ln/>
+        </p:spPr>
+        <p:txBody>
+          <a:bodyPr wrap="square" lIns="0" tIns="0" rIns="0" bIns="0" rtlCol="0" anchor="ctr">
+            <a:normAutofit/>
+          </a:bodyPr>
+          <a:lstStyle/>
+          <a:p>
+            <a:pPr indent="0" marL="0">
+              <a:buNone/>
+            </a:pPr>
+            <a:r>
+              <a:rPr lang="en-US" sz="1700" dirty="0">
+                <a:solidFill>
+                  <a:srgbClr val="1F2937"/>
+                </a:solidFill>
+                <a:latin typeface="Cambria Math" pitchFamily="34" charset="0"/>
+                <a:ea typeface="Cambria Math" pitchFamily="34" charset="-122"/>
+                <a:cs typeface="Cambria Math" pitchFamily="34" charset="-120"/>
+              </a:rPr>
+              <a:t>∂E/∂W⁽ˡ⁾ = δ⁽ˡ⁾ᵀ A⁽ˡ⁻¹⁾</a:t>
+            </a:r>
+            <a:endParaRPr lang="en-US" sz="1700" dirty="0"/>
+          </a:p>
+        </p:txBody>
+      </p:sp>
+      <p:sp>
+        <p:nvSpPr>
+          <p:cNvPr id="12" name="Shape 10"/>
+          <p:cNvSpPr/>
+          <p:nvPr/>
+        </p:nvSpPr>
+        <p:spPr>
+          <a:xfrm>
+            <a:off x="457200" y="3922776"/>
+            <a:ext cx="8229600" cy="868680"/>
+          </a:xfrm>
+          <a:prstGeom prst="roundRect">
+            <a:avLst>
+              <a:gd name="adj" fmla="val 8421"/>
+            </a:avLst>
+          </a:prstGeom>
+          <a:solidFill>
+            <a:srgbClr val="EEF2FF"/>
+          </a:solidFill>
+          <a:ln w="9525">
+            <a:solidFill>
+              <a:srgbClr val="C7D2FE"/>
+            </a:solidFill>
+            <a:prstDash val="solid"/>
+          </a:ln>
+        </p:spPr>
+      </p:sp>
+      <p:sp>
+        <p:nvSpPr>
+          <p:cNvPr id="13" name="Text 11"/>
+          <p:cNvSpPr txBox="1"/>
+          <p:nvPr/>
+        </p:nvSpPr>
+        <p:spPr>
+          <a:xfrm>
+            <a:off x="594360" y="3922776"/>
+            <a:ext cx="2743200" cy="868680"/>
+          </a:xfrm>
+          <a:prstGeom prst="rect">
+            <a:avLst/>
+          </a:prstGeom>
+          <a:noFill/>
+          <a:ln/>
+        </p:spPr>
+        <p:txBody>
+          <a:bodyPr wrap="square" lIns="0" tIns="0" rIns="0" bIns="0" rtlCol="0" anchor="ctr">
+            <a:normAutofit/>
+          </a:bodyPr>
+          <a:lstStyle/>
+          <a:p>
+            <a:pPr indent="0" marL="0">
+              <a:buNone/>
+            </a:pPr>
+            <a:r>
+              <a:rPr lang="en-US" sz="1400" b="1" dirty="0">
+                <a:solidFill>
+                  <a:srgbClr val="312E81"/>
+                </a:solidFill>
+              </a:rPr>
+              <a:t>4. BP4 — vieses</a:t>
+            </a:r>
+            <a:endParaRPr lang="en-US" sz="1400" dirty="0"/>
+          </a:p>
+        </p:txBody>
+      </p:sp>
+      <p:sp>
+        <p:nvSpPr>
+          <p:cNvPr id="14" name="Text 12"/>
+          <p:cNvSpPr txBox="1"/>
+          <p:nvPr/>
+        </p:nvSpPr>
+        <p:spPr>
+          <a:xfrm>
+            <a:off x="3383280" y="3922776"/>
+            <a:ext cx="5212080" cy="868680"/>
+          </a:xfrm>
+          <a:prstGeom prst="rect">
+            <a:avLst/>
+          </a:prstGeom>
+          <a:noFill/>
+          <a:ln/>
+        </p:spPr>
+        <p:txBody>
+          <a:bodyPr wrap="square" lIns="0" tIns="0" rIns="0" bIns="0" rtlCol="0" anchor="ctr">
+            <a:normAutofit/>
+          </a:bodyPr>
+          <a:lstStyle/>
+          <a:p>
+            <a:pPr indent="0" marL="0">
+              <a:buNone/>
+            </a:pPr>
+            <a:r>
+              <a:rPr lang="en-US" sz="1700" dirty="0">
+                <a:solidFill>
+                  <a:srgbClr val="1F2937"/>
+                </a:solidFill>
+                <a:latin typeface="Cambria Math" pitchFamily="34" charset="0"/>
+                <a:ea typeface="Cambria Math" pitchFamily="34" charset="-122"/>
+                <a:cs typeface="Cambria Math" pitchFamily="34" charset="-120"/>
+              </a:rPr>
+              <a:t>∂E/∂b⁽ˡ⁾ = Σ das linhas de δ⁽ˡ⁾</a:t>
+            </a:r>
+            <a:endParaRPr lang="en-US" sz="1700" dirty="0"/>
           </a:p>
         </p:txBody>
       </p:sp>
@@ -4798,7 +6940,7 @@
                 <a:ea typeface="Calibri" pitchFamily="34" charset="-122"/>
                 <a:cs typeface="Calibri" pitchFamily="34" charset="-120"/>
               </a:rPr>
-              <a:t>Aproximação universal</a:t>
+              <a:t>Verificando o gradiente</a:t>
             </a:r>
             <a:endParaRPr lang="en-US" sz="2600" dirty="0"/>
           </a:p>
@@ -4806,7 +6948,7 @@
       </p:sp>
       <p:pic>
         <p:nvPicPr>
-          <p:cNvPr id="3" name="Image 0" descr="Mais neurônios ocultos, melhor ajuste de uma função contínua.">    </p:cNvPr>
+          <p:cNvPr id="3" name="Image 0" descr="Diferenças finitas: o erro relativo fica em torno de 1e-10.">    </p:cNvPr>
           <p:cNvPicPr>
             <a:picLocks noChangeAspect="1"/>
           </p:cNvPicPr>
@@ -4820,8 +6962,8 @@
         </p:blipFill>
         <p:spPr>
           <a:xfrm>
-            <a:off x="1720594" y="1005840"/>
-            <a:ext cx="5702811" cy="3154680"/>
+            <a:off x="2293620" y="1005840"/>
+            <a:ext cx="4556760" cy="3154680"/>
           </a:xfrm>
           <a:prstGeom prst="rect">
             <a:avLst/>
@@ -4860,7 +7002,7 @@
                   <a:srgbClr val="4B5563"/>
                 </a:solidFill>
               </a:rPr>
-              <a:t>Mais neurônios ocultos, melhor ajuste de uma função contínua.</a:t>
+              <a:t>Diferenças finitas: o erro relativo fica em torno de 1e-10.</a:t>
             </a:r>
             <a:endParaRPr lang="en-US" sz="1400" dirty="0"/>
           </a:p>
@@ -4971,7 +7113,7 @@
                 <a:ea typeface="Calibri" pitchFamily="34" charset="-122"/>
                 <a:cs typeface="Calibri" pitchFamily="34" charset="-120"/>
               </a:rPr>
-              <a:t>Lote, minilote, padrão a padrão</a:t>
+              <a:t>XOR com backpropagation</a:t>
             </a:r>
             <a:endParaRPr lang="en-US" sz="2600" dirty="0"/>
           </a:p>
@@ -4979,7 +7121,7 @@
       </p:sp>
       <p:pic>
         <p:nvPicPr>
-          <p:cNvPr id="3" name="Image 0" descr="Compromisso entre ruído e custo por atualização.">    </p:cNvPr>
+          <p:cNvPr id="3" name="Image 0" descr="Uma camada oculta resolve o XOR; nem toda inicialização converge.">    </p:cNvPr>
           <p:cNvPicPr>
             <a:picLocks noChangeAspect="1"/>
           </p:cNvPicPr>
@@ -4993,8 +7135,8 @@
         </p:blipFill>
         <p:spPr>
           <a:xfrm>
-            <a:off x="795361" y="1005840"/>
-            <a:ext cx="7553279" cy="3154680"/>
+            <a:off x="457200" y="1005840"/>
+            <a:ext cx="8229600" cy="3097819"/>
           </a:xfrm>
           <a:prstGeom prst="rect">
             <a:avLst/>
@@ -5009,7 +7151,7 @@
         </p:nvSpPr>
         <p:spPr>
           <a:xfrm>
-            <a:off x="457200" y="4251960"/>
+            <a:off x="457200" y="4195099"/>
             <a:ext cx="8229600" cy="457200"/>
           </a:xfrm>
           <a:prstGeom prst="rect">
@@ -5033,7 +7175,7 @@
                   <a:srgbClr val="4B5563"/>
                 </a:solidFill>
               </a:rPr>
-              <a:t>Compromisso entre ruído e custo por atualização.</a:t>
+              <a:t>Uma camada oculta resolve o XOR; nem toda inicialização converge.</a:t>
             </a:r>
             <a:endParaRPr lang="en-US" sz="1400" dirty="0"/>
           </a:p>
